--- a/PREZ.pptx
+++ b/PREZ.pptx
@@ -5,13 +5,17 @@
     <p:sldMasterId id="2147483648" r:id="rId1"/>
   </p:sldMasterIdLst>
   <p:notesMasterIdLst>
-    <p:notesMasterId r:id="rId6"/>
+    <p:notesMasterId r:id="rId10"/>
   </p:notesMasterIdLst>
   <p:sldIdLst>
     <p:sldId id="256" r:id="rId2"/>
     <p:sldId id="257" r:id="rId3"/>
     <p:sldId id="258" r:id="rId4"/>
-    <p:sldId id="267" r:id="rId5"/>
+    <p:sldId id="268" r:id="rId5"/>
+    <p:sldId id="269" r:id="rId6"/>
+    <p:sldId id="270" r:id="rId7"/>
+    <p:sldId id="271" r:id="rId8"/>
+    <p:sldId id="267" r:id="rId9"/>
   </p:sldIdLst>
   <p:sldSz cx="12192000" cy="6858000"/>
   <p:notesSz cx="6858000" cy="9144000"/>
@@ -200,7 +204,7 @@
           <a:p>
             <a:fld id="{2F2C6676-6336-48A3-9AFF-BEEF1DC2F04E}" type="datetimeFigureOut">
               <a:rPr lang="en-US" smtClean="0"/>
-              <a:t>5/18/2026</a:t>
+              <a:t>5/24/2026</a:t>
             </a:fld>
             <a:endParaRPr lang="en-US"/>
           </a:p>
@@ -614,7 +618,7 @@
           <a:p>
             <a:fld id="{216DDF75-98F2-46ED-BF41-6841AACD6D7B}" type="datetime1">
               <a:rPr lang="en-US" smtClean="0"/>
-              <a:t>5/18/2026</a:t>
+              <a:t>5/24/2026</a:t>
             </a:fld>
             <a:endParaRPr lang="en-US"/>
           </a:p>
@@ -812,7 +816,7 @@
           <a:p>
             <a:fld id="{F015F622-135A-4D3C-84CD-5A493CC35A1E}" type="datetime1">
               <a:rPr lang="en-US" smtClean="0"/>
-              <a:t>5/18/2026</a:t>
+              <a:t>5/24/2026</a:t>
             </a:fld>
             <a:endParaRPr lang="en-US"/>
           </a:p>
@@ -1020,7 +1024,7 @@
           <a:p>
             <a:fld id="{45BC9CC1-F0A8-4A5B-ACDF-9BD8C810563B}" type="datetime1">
               <a:rPr lang="en-US" smtClean="0"/>
-              <a:t>5/18/2026</a:t>
+              <a:t>5/24/2026</a:t>
             </a:fld>
             <a:endParaRPr lang="en-US"/>
           </a:p>
@@ -1218,7 +1222,7 @@
           <a:p>
             <a:fld id="{805C0A48-F169-4868-950C-C0BF07077612}" type="datetime1">
               <a:rPr lang="en-US" smtClean="0"/>
-              <a:t>5/18/2026</a:t>
+              <a:t>5/24/2026</a:t>
             </a:fld>
             <a:endParaRPr lang="en-US"/>
           </a:p>
@@ -1493,7 +1497,7 @@
           <a:p>
             <a:fld id="{B2FA2A41-BF1E-433D-A63D-7B1C861340FC}" type="datetime1">
               <a:rPr lang="en-US" smtClean="0"/>
-              <a:t>5/18/2026</a:t>
+              <a:t>5/24/2026</a:t>
             </a:fld>
             <a:endParaRPr lang="en-US"/>
           </a:p>
@@ -1758,7 +1762,7 @@
           <a:p>
             <a:fld id="{2F42C828-9A8F-478D-A9BD-9DF638EF5087}" type="datetime1">
               <a:rPr lang="en-US" smtClean="0"/>
-              <a:t>5/18/2026</a:t>
+              <a:t>5/24/2026</a:t>
             </a:fld>
             <a:endParaRPr lang="en-US"/>
           </a:p>
@@ -2170,7 +2174,7 @@
           <a:p>
             <a:fld id="{4A85BE8B-17AA-452E-AF5A-A805E1055FA1}" type="datetime1">
               <a:rPr lang="en-US" smtClean="0"/>
-              <a:t>5/18/2026</a:t>
+              <a:t>5/24/2026</a:t>
             </a:fld>
             <a:endParaRPr lang="en-US"/>
           </a:p>
@@ -2311,7 +2315,7 @@
           <a:p>
             <a:fld id="{21285E3C-251E-4292-87F6-2212204ECA2B}" type="datetime1">
               <a:rPr lang="en-US" smtClean="0"/>
-              <a:t>5/18/2026</a:t>
+              <a:t>5/24/2026</a:t>
             </a:fld>
             <a:endParaRPr lang="en-US"/>
           </a:p>
@@ -2424,7 +2428,7 @@
           <a:p>
             <a:fld id="{551E1260-D33D-47AA-B882-BF3928478AF5}" type="datetime1">
               <a:rPr lang="en-US" smtClean="0"/>
-              <a:t>5/18/2026</a:t>
+              <a:t>5/24/2026</a:t>
             </a:fld>
             <a:endParaRPr lang="en-US"/>
           </a:p>
@@ -2735,7 +2739,7 @@
           <a:p>
             <a:fld id="{B1BBFB52-2362-45D7-B8C5-B12D0BF071AA}" type="datetime1">
               <a:rPr lang="en-US" smtClean="0"/>
-              <a:t>5/18/2026</a:t>
+              <a:t>5/24/2026</a:t>
             </a:fld>
             <a:endParaRPr lang="en-US"/>
           </a:p>
@@ -3023,7 +3027,7 @@
           <a:p>
             <a:fld id="{E49D3117-01EB-4EF8-81B5-FD92832B6B5C}" type="datetime1">
               <a:rPr lang="en-US" smtClean="0"/>
-              <a:t>5/18/2026</a:t>
+              <a:t>5/24/2026</a:t>
             </a:fld>
             <a:endParaRPr lang="en-US"/>
           </a:p>
@@ -3269,7 +3273,7 @@
           <a:p>
             <a:fld id="{0CE0A7F4-AB13-430E-9DF9-A5874CB1FEEE}" type="datetime1">
               <a:rPr lang="en-US" smtClean="0"/>
-              <a:t>5/18/2026</a:t>
+              <a:t>5/24/2026</a:t>
             </a:fld>
             <a:endParaRPr lang="en-US"/>
           </a:p>
@@ -3811,28 +3815,14 @@
         </p:nvSpPr>
         <p:spPr/>
         <p:txBody>
-          <a:bodyPr/>
+          <a:bodyPr>
+            <a:normAutofit fontScale="90000"/>
+          </a:bodyPr>
           <a:lstStyle/>
           <a:p>
             <a:r>
-              <a:rPr lang="en-US" dirty="0"/>
-              <a:t>Podpora </a:t>
-            </a:r>
-            <a:r>
               <a:rPr lang="en-US" dirty="0" err="1"/>
-              <a:t>výu</a:t>
-            </a:r>
-            <a:r>
-              <a:rPr lang="sk-SK" dirty="0"/>
-              <a:t>č</a:t>
-            </a:r>
-            <a:r>
-              <a:rPr lang="en-US" dirty="0"/>
-              <a:t>by v </a:t>
-            </a:r>
-            <a:r>
-              <a:rPr lang="en-US" dirty="0" err="1"/>
-              <a:t>Laboratóriu</a:t>
+              <a:t>Návrh</a:t>
             </a:r>
             <a:r>
               <a:rPr lang="en-US" dirty="0"/>
@@ -3840,7 +3830,31 @@
             </a:r>
             <a:r>
               <a:rPr lang="en-US" dirty="0" err="1"/>
-              <a:t>kybernetiky</a:t>
+              <a:t>implementácie</a:t>
+            </a:r>
+            <a:r>
+              <a:rPr lang="en-US" dirty="0"/>
+              <a:t> </a:t>
+            </a:r>
+            <a:r>
+              <a:rPr lang="en-US" dirty="0" err="1"/>
+              <a:t>vybraných</a:t>
+            </a:r>
+            <a:r>
+              <a:rPr lang="en-US" dirty="0"/>
+              <a:t> </a:t>
+            </a:r>
+            <a:r>
+              <a:rPr lang="en-US" dirty="0" err="1"/>
+              <a:t>algoritmov</a:t>
+            </a:r>
+            <a:r>
+              <a:rPr lang="en-US" dirty="0"/>
+              <a:t> </a:t>
+            </a:r>
+            <a:r>
+              <a:rPr lang="en-US" dirty="0" err="1"/>
+              <a:t>riadenia</a:t>
             </a:r>
             <a:endParaRPr lang="en-US" dirty="0"/>
           </a:p>
@@ -3864,47 +3878,76 @@
         </p:nvSpPr>
         <p:spPr/>
         <p:txBody>
-          <a:bodyPr/>
+          <a:bodyPr>
+            <a:normAutofit fontScale="85000" lnSpcReduction="20000"/>
+          </a:bodyPr>
           <a:lstStyle/>
           <a:p>
             <a:r>
               <a:rPr lang="en-US" dirty="0" err="1"/>
-              <a:t>Vykonal</a:t>
-            </a:r>
-            <a:r>
-              <a:rPr lang="ru-RU" dirty="0"/>
-              <a:t>: </a:t>
+              <a:t>Diplomova</a:t>
+            </a:r>
+            <a:r>
+              <a:rPr lang="en-US" dirty="0"/>
+              <a:t> </a:t>
             </a:r>
             <a:r>
               <a:rPr lang="en-US" dirty="0" err="1"/>
+              <a:t>praca</a:t>
+            </a:r>
+            <a:endParaRPr lang="en-US" dirty="0"/>
+          </a:p>
+          <a:p>
+            <a:endParaRPr lang="en-US" dirty="0"/>
+          </a:p>
+          <a:p>
+            <a:endParaRPr lang="en-US" dirty="0"/>
+          </a:p>
+          <a:p>
+            <a:pPr algn="r"/>
+            <a:r>
+              <a:rPr lang="en-US" sz="1800" dirty="0" err="1"/>
+              <a:t>Vykonávateľ</a:t>
+            </a:r>
+            <a:r>
+              <a:rPr lang="ru-RU" sz="1800" dirty="0"/>
+              <a:t> - </a:t>
+            </a:r>
+            <a:r>
+              <a:rPr lang="en-US" sz="1800" dirty="0" err="1"/>
               <a:t>Bc</a:t>
             </a:r>
             <a:r>
-              <a:rPr lang="en-US" dirty="0"/>
-              <a:t>. Andrii Stoliar </a:t>
-            </a:r>
-          </a:p>
-          <a:p>
-            <a:r>
-              <a:rPr lang="en-US" dirty="0" err="1"/>
+              <a:rPr lang="en-US" sz="1800" dirty="0"/>
+              <a:t>. Andrii Stoliar</a:t>
+            </a:r>
+            <a:endParaRPr lang="ru-RU" sz="1800" dirty="0"/>
+          </a:p>
+          <a:p>
+            <a:pPr algn="r"/>
+            <a:r>
+              <a:rPr lang="en-US" sz="1800" dirty="0" err="1"/>
               <a:t>Vedúci</a:t>
             </a:r>
             <a:r>
-              <a:rPr lang="ru-RU" dirty="0"/>
-              <a:t>: </a:t>
-            </a:r>
-            <a:r>
-              <a:rPr lang="en-US" dirty="0"/>
+              <a:rPr lang="ru-RU" sz="1800" dirty="0"/>
+              <a:t> - </a:t>
+            </a:r>
+            <a:r>
+              <a:rPr lang="en-US" sz="1800" dirty="0"/>
               <a:t>Ing. Marián </a:t>
             </a:r>
             <a:r>
-              <a:rPr lang="en-US" dirty="0" err="1"/>
+              <a:rPr lang="en-US" sz="1800" dirty="0" err="1"/>
               <a:t>Tárník</a:t>
             </a:r>
             <a:r>
-              <a:rPr lang="en-US" dirty="0"/>
+              <a:rPr lang="en-US" sz="1800" dirty="0"/>
               <a:t>, PhD.</a:t>
             </a:r>
+          </a:p>
+          <a:p>
+            <a:endParaRPr lang="ru-RU" dirty="0"/>
           </a:p>
         </p:txBody>
       </p:sp>
@@ -3989,12 +4032,16 @@
           <a:lstStyle/>
           <a:p>
             <a:r>
+              <a:rPr lang="en-US" dirty="0" err="1"/>
+              <a:t>Ciele</a:t>
+            </a:r>
+            <a:r>
               <a:rPr lang="en-US" dirty="0"/>
-              <a:t>KUT (</a:t>
-            </a:r>
-            <a:r>
-              <a:rPr lang="sk-SK" dirty="0"/>
-              <a:t>Krátke učebné texty)</a:t>
+              <a:t> </a:t>
+            </a:r>
+            <a:r>
+              <a:rPr lang="en-US" dirty="0" err="1"/>
+              <a:t>práce</a:t>
             </a:r>
             <a:endParaRPr lang="en-US" dirty="0"/>
           </a:p>
@@ -4023,9 +4070,317 @@
           </a:bodyPr>
           <a:lstStyle/>
           <a:p>
-            <a:pPr marL="0" indent="0">
-              <a:buNone/>
-            </a:pPr>
+            <a:r>
+              <a:rPr lang="en-US" dirty="0" err="1"/>
+              <a:t>Vybrať</a:t>
+            </a:r>
+            <a:r>
+              <a:rPr lang="en-US" dirty="0"/>
+              <a:t> </a:t>
+            </a:r>
+            <a:r>
+              <a:rPr lang="en-US" dirty="0" err="1"/>
+              <a:t>laboratórny</a:t>
+            </a:r>
+            <a:r>
+              <a:rPr lang="en-US" dirty="0"/>
+              <a:t> model z </a:t>
+            </a:r>
+            <a:r>
+              <a:rPr lang="en-US" dirty="0" err="1"/>
+              <a:t>dostupných</a:t>
+            </a:r>
+            <a:r>
+              <a:rPr lang="en-US" dirty="0"/>
+              <a:t> </a:t>
+            </a:r>
+            <a:r>
+              <a:rPr lang="en-US" dirty="0" err="1"/>
+              <a:t>dynamických</a:t>
+            </a:r>
+            <a:r>
+              <a:rPr lang="en-US" dirty="0"/>
+              <a:t> </a:t>
+            </a:r>
+            <a:r>
+              <a:rPr lang="en-US" dirty="0" err="1"/>
+              <a:t>systémov</a:t>
+            </a:r>
+            <a:r>
+              <a:rPr lang="en-US" dirty="0"/>
+              <a:t>.</a:t>
+            </a:r>
+            <a:endParaRPr lang="ru-RU" dirty="0"/>
+          </a:p>
+          <a:p>
+            <a:r>
+              <a:rPr lang="en-US" dirty="0" err="1"/>
+              <a:t>Oboznámiť</a:t>
+            </a:r>
+            <a:r>
+              <a:rPr lang="en-US" dirty="0"/>
+              <a:t> </a:t>
+            </a:r>
+            <a:r>
+              <a:rPr lang="en-US" dirty="0" err="1"/>
+              <a:t>sa</a:t>
+            </a:r>
+            <a:r>
+              <a:rPr lang="en-US" dirty="0"/>
+              <a:t> s </a:t>
+            </a:r>
+            <a:r>
+              <a:rPr lang="en-US" dirty="0" err="1"/>
+              <a:t>jeho</a:t>
+            </a:r>
+            <a:r>
+              <a:rPr lang="en-US" dirty="0"/>
+              <a:t> </a:t>
+            </a:r>
+            <a:r>
+              <a:rPr lang="en-US" dirty="0" err="1"/>
+              <a:t>hardvérom</a:t>
+            </a:r>
+            <a:r>
+              <a:rPr lang="en-US" dirty="0"/>
+              <a:t> a </a:t>
+            </a:r>
+            <a:r>
+              <a:rPr lang="en-US" dirty="0" err="1"/>
+              <a:t>vypracovať</a:t>
+            </a:r>
+            <a:r>
+              <a:rPr lang="en-US" dirty="0"/>
+              <a:t> </a:t>
+            </a:r>
+            <a:r>
+              <a:rPr lang="en-US" dirty="0" err="1"/>
+              <a:t>stručnú</a:t>
+            </a:r>
+            <a:r>
+              <a:rPr lang="en-US" dirty="0"/>
+              <a:t> </a:t>
+            </a:r>
+            <a:r>
+              <a:rPr lang="en-US" dirty="0" err="1"/>
+              <a:t>technickú</a:t>
+            </a:r>
+            <a:r>
+              <a:rPr lang="en-US" dirty="0"/>
+              <a:t> </a:t>
+            </a:r>
+            <a:r>
+              <a:rPr lang="en-US" dirty="0" err="1"/>
+              <a:t>dokumentáciu</a:t>
+            </a:r>
+            <a:r>
+              <a:rPr lang="en-US" dirty="0"/>
+              <a:t>.</a:t>
+            </a:r>
+            <a:endParaRPr lang="ru-RU" dirty="0"/>
+          </a:p>
+          <a:p>
+            <a:r>
+              <a:rPr lang="en-US" dirty="0" err="1"/>
+              <a:t>Vybrať</a:t>
+            </a:r>
+            <a:r>
+              <a:rPr lang="en-US" dirty="0"/>
+              <a:t> </a:t>
+            </a:r>
+            <a:r>
+              <a:rPr lang="en-US" dirty="0" err="1"/>
+              <a:t>riadiace</a:t>
+            </a:r>
+            <a:r>
+              <a:rPr lang="en-US" dirty="0"/>
+              <a:t> platformy a </a:t>
+            </a:r>
+            <a:r>
+              <a:rPr lang="en-US" dirty="0" err="1"/>
+              <a:t>pripraviť</a:t>
+            </a:r>
+            <a:r>
+              <a:rPr lang="en-US" dirty="0"/>
+              <a:t> ich </a:t>
+            </a:r>
+            <a:r>
+              <a:rPr lang="en-US" dirty="0" err="1"/>
+              <a:t>komunikačné</a:t>
+            </a:r>
+            <a:r>
+              <a:rPr lang="en-US" dirty="0"/>
+              <a:t> </a:t>
+            </a:r>
+            <a:r>
+              <a:rPr lang="en-US" dirty="0" err="1"/>
+              <a:t>rozhranie</a:t>
+            </a:r>
+            <a:r>
+              <a:rPr lang="en-US" dirty="0"/>
+              <a:t> so </a:t>
+            </a:r>
+            <a:r>
+              <a:rPr lang="en-US" dirty="0" err="1"/>
+              <a:t>systémom</a:t>
+            </a:r>
+            <a:r>
+              <a:rPr lang="en-US" dirty="0"/>
+              <a:t>.</a:t>
+            </a:r>
+            <a:endParaRPr lang="ru-RU" dirty="0"/>
+          </a:p>
+          <a:p>
+            <a:r>
+              <a:rPr lang="en-US" dirty="0" err="1"/>
+              <a:t>Vybrať</a:t>
+            </a:r>
+            <a:r>
+              <a:rPr lang="en-US" dirty="0"/>
+              <a:t> a </a:t>
+            </a:r>
+            <a:r>
+              <a:rPr lang="en-US" dirty="0" err="1"/>
+              <a:t>opísať</a:t>
+            </a:r>
+            <a:r>
+              <a:rPr lang="en-US" dirty="0"/>
+              <a:t> </a:t>
+            </a:r>
+            <a:r>
+              <a:rPr lang="en-US" dirty="0" err="1"/>
+              <a:t>riadiace</a:t>
+            </a:r>
+            <a:r>
+              <a:rPr lang="en-US" dirty="0"/>
+              <a:t> </a:t>
+            </a:r>
+            <a:r>
+              <a:rPr lang="en-US" dirty="0" err="1"/>
+              <a:t>algoritmy</a:t>
+            </a:r>
+            <a:r>
+              <a:rPr lang="en-US" dirty="0"/>
+              <a:t> </a:t>
+            </a:r>
+            <a:r>
+              <a:rPr lang="en-US" dirty="0" err="1"/>
+              <a:t>určené</a:t>
+            </a:r>
+            <a:r>
+              <a:rPr lang="en-US" dirty="0"/>
+              <a:t> </a:t>
+            </a:r>
+            <a:r>
+              <a:rPr lang="en-US" dirty="0" err="1"/>
+              <a:t>na</a:t>
+            </a:r>
+            <a:r>
+              <a:rPr lang="en-US" dirty="0"/>
+              <a:t> </a:t>
+            </a:r>
+            <a:r>
+              <a:rPr lang="en-US" dirty="0" err="1"/>
+              <a:t>implementáciu</a:t>
+            </a:r>
+            <a:r>
+              <a:rPr lang="en-US" dirty="0"/>
+              <a:t>.</a:t>
+            </a:r>
+            <a:endParaRPr lang="ru-RU" dirty="0"/>
+          </a:p>
+          <a:p>
+            <a:r>
+              <a:rPr lang="en-US" dirty="0" err="1"/>
+              <a:t>Realizovať</a:t>
+            </a:r>
+            <a:r>
+              <a:rPr lang="en-US" dirty="0"/>
+              <a:t> </a:t>
+            </a:r>
+            <a:r>
+              <a:rPr lang="en-US" dirty="0" err="1"/>
+              <a:t>riadiace</a:t>
+            </a:r>
+            <a:r>
+              <a:rPr lang="en-US" dirty="0"/>
+              <a:t> </a:t>
+            </a:r>
+            <a:r>
+              <a:rPr lang="en-US" dirty="0" err="1"/>
+              <a:t>algoritmy</a:t>
+            </a:r>
+            <a:r>
+              <a:rPr lang="en-US" dirty="0"/>
+              <a:t> </a:t>
+            </a:r>
+            <a:r>
+              <a:rPr lang="en-US" dirty="0" err="1"/>
+              <a:t>na</a:t>
+            </a:r>
+            <a:r>
+              <a:rPr lang="en-US" dirty="0"/>
+              <a:t> </a:t>
+            </a:r>
+            <a:r>
+              <a:rPr lang="en-US" dirty="0" err="1"/>
+              <a:t>vybraných</a:t>
+            </a:r>
+            <a:r>
+              <a:rPr lang="en-US" dirty="0"/>
+              <a:t> </a:t>
+            </a:r>
+            <a:r>
+              <a:rPr lang="en-US" dirty="0" err="1"/>
+              <a:t>platformách</a:t>
+            </a:r>
+            <a:r>
+              <a:rPr lang="en-US" dirty="0"/>
+              <a:t>.</a:t>
+            </a:r>
+            <a:endParaRPr lang="ru-RU" dirty="0"/>
+          </a:p>
+          <a:p>
+            <a:r>
+              <a:rPr lang="en-US" dirty="0" err="1"/>
+              <a:t>Experimentálne</a:t>
+            </a:r>
+            <a:r>
+              <a:rPr lang="en-US" dirty="0"/>
+              <a:t> </a:t>
+            </a:r>
+            <a:r>
+              <a:rPr lang="en-US" dirty="0" err="1"/>
+              <a:t>overiť</a:t>
+            </a:r>
+            <a:r>
+              <a:rPr lang="en-US" dirty="0"/>
+              <a:t> a </a:t>
+            </a:r>
+            <a:r>
+              <a:rPr lang="en-US" dirty="0" err="1"/>
+              <a:t>vyhodnotiť</a:t>
+            </a:r>
+            <a:r>
+              <a:rPr lang="en-US" dirty="0"/>
+              <a:t> </a:t>
+            </a:r>
+            <a:r>
+              <a:rPr lang="en-US" dirty="0" err="1"/>
+              <a:t>dosiahnuté</a:t>
+            </a:r>
+            <a:r>
+              <a:rPr lang="en-US" dirty="0"/>
+              <a:t> </a:t>
+            </a:r>
+            <a:r>
+              <a:rPr lang="en-US" dirty="0" err="1"/>
+              <a:t>výsledky</a:t>
+            </a:r>
+            <a:r>
+              <a:rPr lang="en-US" dirty="0"/>
+              <a:t>.</a:t>
+            </a:r>
             <a:endParaRPr lang="ru-RU" dirty="0"/>
           </a:p>
         </p:txBody>
@@ -4124,8 +4479,21 @@
             </a:r>
             <a:r>
               <a:rPr lang="en-US" dirty="0"/>
-              <a:t> TS</a:t>
-            </a:r>
+              <a:t> TS - </a:t>
+            </a:r>
+            <a:r>
+              <a:rPr lang="en-US" dirty="0" err="1"/>
+              <a:t>popis</a:t>
+            </a:r>
+            <a:r>
+              <a:rPr lang="en-US" dirty="0"/>
+              <a:t> </a:t>
+            </a:r>
+            <a:r>
+              <a:rPr lang="en-US" dirty="0" err="1"/>
+              <a:t>systému</a:t>
+            </a:r>
+            <a:endParaRPr lang="en-US" dirty="0"/>
           </a:p>
         </p:txBody>
       </p:sp>
@@ -4160,10 +4528,10 @@
       </p:sp>
       <p:pic>
         <p:nvPicPr>
-          <p:cNvPr id="7" name="Picture 6">
-            <a:extLst>
-              <a:ext uri="{FF2B5EF4-FFF2-40B4-BE49-F238E27FC236}">
-                <a16:creationId xmlns:a16="http://schemas.microsoft.com/office/drawing/2014/main" id="{3ED4F671-EA52-0638-DF19-33708262E13C}"/>
+          <p:cNvPr id="10" name="Picture 9" descr="A close-up of a light&#10;&#10;AI-generated content may be incorrect.">
+            <a:extLst>
+              <a:ext uri="{FF2B5EF4-FFF2-40B4-BE49-F238E27FC236}">
+                <a16:creationId xmlns:a16="http://schemas.microsoft.com/office/drawing/2014/main" id="{01ACE7EB-1B2E-03AF-425D-B52A0B3A41B4}"/>
               </a:ext>
             </a:extLst>
           </p:cNvPr>
@@ -4180,20 +4548,494 @@
         </p:blipFill>
         <p:spPr>
           <a:xfrm>
-            <a:off x="838200" y="1534101"/>
-            <a:ext cx="5497945" cy="2898266"/>
+            <a:off x="838200" y="1595849"/>
+            <a:ext cx="5556250" cy="2945512"/>
           </a:xfrm>
           <a:prstGeom prst="rect">
             <a:avLst/>
           </a:prstGeom>
         </p:spPr>
       </p:pic>
-      <p:sp>
-        <p:nvSpPr>
-          <p:cNvPr id="11" name="TextBox 10">
-            <a:extLst>
-              <a:ext uri="{FF2B5EF4-FFF2-40B4-BE49-F238E27FC236}">
-                <a16:creationId xmlns:a16="http://schemas.microsoft.com/office/drawing/2014/main" id="{46DEB083-04DB-9C8E-2DE0-2E91DD0D1751}"/>
+      <p:graphicFrame>
+        <p:nvGraphicFramePr>
+          <p:cNvPr id="12" name="Table 11">
+            <a:extLst>
+              <a:ext uri="{FF2B5EF4-FFF2-40B4-BE49-F238E27FC236}">
+                <a16:creationId xmlns:a16="http://schemas.microsoft.com/office/drawing/2014/main" id="{ED4C06A5-BFC5-A959-13FD-482CF170ABDC}"/>
+              </a:ext>
+            </a:extLst>
+          </p:cNvPr>
+          <p:cNvGraphicFramePr>
+            <a:graphicFrameLocks noGrp="1"/>
+          </p:cNvGraphicFramePr>
+          <p:nvPr>
+            <p:extLst>
+              <p:ext uri="{D42A27DB-BD31-4B8C-83A1-F6EECF244321}">
+                <p14:modId xmlns:p14="http://schemas.microsoft.com/office/powerpoint/2010/main" val="15747249"/>
+              </p:ext>
+            </p:extLst>
+          </p:nvPr>
+        </p:nvGraphicFramePr>
+        <p:xfrm>
+          <a:off x="6788151" y="1595849"/>
+          <a:ext cx="4565649" cy="1854200"/>
+        </p:xfrm>
+        <a:graphic>
+          <a:graphicData uri="http://schemas.openxmlformats.org/drawingml/2006/table">
+            <a:tbl>
+              <a:tblPr firstRow="1" bandRow="1">
+                <a:tableStyleId>{5C22544A-7EE6-4342-B048-85BDC9FD1C3A}</a:tableStyleId>
+              </a:tblPr>
+              <a:tblGrid>
+                <a:gridCol w="1521883">
+                  <a:extLst>
+                    <a:ext uri="{9D8B030D-6E8A-4147-A177-3AD203B41FA5}">
+                      <a16:colId xmlns:a16="http://schemas.microsoft.com/office/drawing/2014/main" val="329238846"/>
+                    </a:ext>
+                  </a:extLst>
+                </a:gridCol>
+                <a:gridCol w="2103967">
+                  <a:extLst>
+                    <a:ext uri="{9D8B030D-6E8A-4147-A177-3AD203B41FA5}">
+                      <a16:colId xmlns:a16="http://schemas.microsoft.com/office/drawing/2014/main" val="1100591826"/>
+                    </a:ext>
+                  </a:extLst>
+                </a:gridCol>
+                <a:gridCol w="939799">
+                  <a:extLst>
+                    <a:ext uri="{9D8B030D-6E8A-4147-A177-3AD203B41FA5}">
+                      <a16:colId xmlns:a16="http://schemas.microsoft.com/office/drawing/2014/main" val="1985291857"/>
+                    </a:ext>
+                  </a:extLst>
+                </a:gridCol>
+              </a:tblGrid>
+              <a:tr h="370840">
+                <a:tc>
+                  <a:txBody>
+                    <a:bodyPr/>
+                    <a:lstStyle/>
+                    <a:p>
+                      <a:r>
+                        <a:rPr lang="en-US" dirty="0" err="1">
+                          <a:latin typeface="Times New Roman" panose="02020603050405020304" pitchFamily="18" charset="0"/>
+                          <a:cs typeface="Times New Roman" panose="02020603050405020304" pitchFamily="18" charset="0"/>
+                        </a:rPr>
+                        <a:t>Typ</a:t>
+                      </a:r>
+                      <a:r>
+                        <a:rPr lang="en-US" dirty="0">
+                          <a:latin typeface="Times New Roman" panose="02020603050405020304" pitchFamily="18" charset="0"/>
+                          <a:cs typeface="Times New Roman" panose="02020603050405020304" pitchFamily="18" charset="0"/>
+                        </a:rPr>
+                        <a:t> </a:t>
+                      </a:r>
+                      <a:r>
+                        <a:rPr lang="en-US" dirty="0" err="1">
+                          <a:latin typeface="Times New Roman" panose="02020603050405020304" pitchFamily="18" charset="0"/>
+                          <a:cs typeface="Times New Roman" panose="02020603050405020304" pitchFamily="18" charset="0"/>
+                        </a:rPr>
+                        <a:t>signálu</a:t>
+                      </a:r>
+                      <a:endParaRPr lang="en-US" dirty="0">
+                        <a:latin typeface="Times New Roman" panose="02020603050405020304" pitchFamily="18" charset="0"/>
+                        <a:cs typeface="Times New Roman" panose="02020603050405020304" pitchFamily="18" charset="0"/>
+                      </a:endParaRPr>
+                    </a:p>
+                  </a:txBody>
+                  <a:tcPr/>
+                </a:tc>
+                <a:tc>
+                  <a:txBody>
+                    <a:bodyPr/>
+                    <a:lstStyle/>
+                    <a:p>
+                      <a:r>
+                        <a:rPr lang="en-US" dirty="0" err="1">
+                          <a:latin typeface="Times New Roman" panose="02020603050405020304" pitchFamily="18" charset="0"/>
+                          <a:cs typeface="Times New Roman" panose="02020603050405020304" pitchFamily="18" charset="0"/>
+                        </a:rPr>
+                        <a:t>Označenie</a:t>
+                      </a:r>
+                      <a:endParaRPr lang="en-US" dirty="0">
+                        <a:latin typeface="Times New Roman" panose="02020603050405020304" pitchFamily="18" charset="0"/>
+                        <a:cs typeface="Times New Roman" panose="02020603050405020304" pitchFamily="18" charset="0"/>
+                      </a:endParaRPr>
+                    </a:p>
+                  </a:txBody>
+                  <a:tcPr/>
+                </a:tc>
+                <a:tc>
+                  <a:txBody>
+                    <a:bodyPr/>
+                    <a:lstStyle/>
+                    <a:p>
+                      <a:r>
+                        <a:rPr lang="en-US" dirty="0" err="1">
+                          <a:latin typeface="Times New Roman" panose="02020603050405020304" pitchFamily="18" charset="0"/>
+                          <a:cs typeface="Times New Roman" panose="02020603050405020304" pitchFamily="18" charset="0"/>
+                        </a:rPr>
+                        <a:t>Rozsah</a:t>
+                      </a:r>
+                      <a:endParaRPr lang="en-US" dirty="0">
+                        <a:latin typeface="Times New Roman" panose="02020603050405020304" pitchFamily="18" charset="0"/>
+                        <a:cs typeface="Times New Roman" panose="02020603050405020304" pitchFamily="18" charset="0"/>
+                      </a:endParaRPr>
+                    </a:p>
+                  </a:txBody>
+                  <a:tcPr/>
+                </a:tc>
+                <a:extLst>
+                  <a:ext uri="{0D108BD9-81ED-4DB2-BD59-A6C34878D82A}">
+                    <a16:rowId xmlns:a16="http://schemas.microsoft.com/office/drawing/2014/main" val="1959611993"/>
+                  </a:ext>
+                </a:extLst>
+              </a:tr>
+              <a:tr h="370840">
+                <a:tc>
+                  <a:txBody>
+                    <a:bodyPr/>
+                    <a:lstStyle/>
+                    <a:p>
+                      <a:r>
+                        <a:rPr lang="en-US" dirty="0" err="1">
+                          <a:latin typeface="Times New Roman" panose="02020603050405020304" pitchFamily="18" charset="0"/>
+                          <a:cs typeface="Times New Roman" panose="02020603050405020304" pitchFamily="18" charset="0"/>
+                        </a:rPr>
+                        <a:t>Vstup</a:t>
+                      </a:r>
+                      <a:endParaRPr lang="en-US" dirty="0">
+                        <a:latin typeface="Times New Roman" panose="02020603050405020304" pitchFamily="18" charset="0"/>
+                        <a:cs typeface="Times New Roman" panose="02020603050405020304" pitchFamily="18" charset="0"/>
+                      </a:endParaRPr>
+                    </a:p>
+                  </a:txBody>
+                  <a:tcPr/>
+                </a:tc>
+                <a:tc>
+                  <a:txBody>
+                    <a:bodyPr/>
+                    <a:lstStyle/>
+                    <a:p>
+                      <a:r>
+                        <a:rPr lang="en-US" dirty="0" err="1">
+                          <a:latin typeface="Times New Roman" panose="02020603050405020304" pitchFamily="18" charset="0"/>
+                          <a:cs typeface="Times New Roman" panose="02020603050405020304" pitchFamily="18" charset="0"/>
+                        </a:rPr>
+                        <a:t>Ventilátor</a:t>
+                      </a:r>
+                      <a:endParaRPr lang="en-US" dirty="0">
+                        <a:latin typeface="Times New Roman" panose="02020603050405020304" pitchFamily="18" charset="0"/>
+                        <a:cs typeface="Times New Roman" panose="02020603050405020304" pitchFamily="18" charset="0"/>
+                      </a:endParaRPr>
+                    </a:p>
+                  </a:txBody>
+                  <a:tcPr/>
+                </a:tc>
+                <a:tc>
+                  <a:txBody>
+                    <a:bodyPr/>
+                    <a:lstStyle/>
+                    <a:p>
+                      <a:r>
+                        <a:rPr lang="en-US" dirty="0">
+                          <a:latin typeface="Times New Roman" panose="02020603050405020304" pitchFamily="18" charset="0"/>
+                          <a:cs typeface="Times New Roman" panose="02020603050405020304" pitchFamily="18" charset="0"/>
+                        </a:rPr>
+                        <a:t>0–10 V</a:t>
+                      </a:r>
+                    </a:p>
+                  </a:txBody>
+                  <a:tcPr/>
+                </a:tc>
+                <a:extLst>
+                  <a:ext uri="{0D108BD9-81ED-4DB2-BD59-A6C34878D82A}">
+                    <a16:rowId xmlns:a16="http://schemas.microsoft.com/office/drawing/2014/main" val="2133122671"/>
+                  </a:ext>
+                </a:extLst>
+              </a:tr>
+              <a:tr h="370840">
+                <a:tc>
+                  <a:txBody>
+                    <a:bodyPr/>
+                    <a:lstStyle/>
+                    <a:p>
+                      <a:r>
+                        <a:rPr lang="en-US" dirty="0" err="1">
+                          <a:latin typeface="Times New Roman" panose="02020603050405020304" pitchFamily="18" charset="0"/>
+                          <a:cs typeface="Times New Roman" panose="02020603050405020304" pitchFamily="18" charset="0"/>
+                        </a:rPr>
+                        <a:t>Vstup</a:t>
+                      </a:r>
+                      <a:endParaRPr lang="en-US" dirty="0">
+                        <a:latin typeface="Times New Roman" panose="02020603050405020304" pitchFamily="18" charset="0"/>
+                        <a:cs typeface="Times New Roman" panose="02020603050405020304" pitchFamily="18" charset="0"/>
+                      </a:endParaRPr>
+                    </a:p>
+                  </a:txBody>
+                  <a:tcPr/>
+                </a:tc>
+                <a:tc>
+                  <a:txBody>
+                    <a:bodyPr/>
+                    <a:lstStyle/>
+                    <a:p>
+                      <a:r>
+                        <a:rPr lang="en-US" dirty="0" err="1">
+                          <a:latin typeface="Times New Roman" panose="02020603050405020304" pitchFamily="18" charset="0"/>
+                          <a:cs typeface="Times New Roman" panose="02020603050405020304" pitchFamily="18" charset="0"/>
+                        </a:rPr>
+                        <a:t>Výkon</a:t>
+                      </a:r>
+                      <a:r>
+                        <a:rPr lang="en-US" dirty="0">
+                          <a:latin typeface="Times New Roman" panose="02020603050405020304" pitchFamily="18" charset="0"/>
+                          <a:cs typeface="Times New Roman" panose="02020603050405020304" pitchFamily="18" charset="0"/>
+                        </a:rPr>
+                        <a:t> </a:t>
+                      </a:r>
+                      <a:r>
+                        <a:rPr lang="en-US" dirty="0" err="1">
+                          <a:latin typeface="Times New Roman" panose="02020603050405020304" pitchFamily="18" charset="0"/>
+                          <a:cs typeface="Times New Roman" panose="02020603050405020304" pitchFamily="18" charset="0"/>
+                        </a:rPr>
+                        <a:t>špirály</a:t>
+                      </a:r>
+                      <a:endParaRPr lang="en-US" dirty="0">
+                        <a:latin typeface="Times New Roman" panose="02020603050405020304" pitchFamily="18" charset="0"/>
+                        <a:cs typeface="Times New Roman" panose="02020603050405020304" pitchFamily="18" charset="0"/>
+                      </a:endParaRPr>
+                    </a:p>
+                  </a:txBody>
+                  <a:tcPr/>
+                </a:tc>
+                <a:tc>
+                  <a:txBody>
+                    <a:bodyPr/>
+                    <a:lstStyle/>
+                    <a:p>
+                      <a:r>
+                        <a:rPr lang="en-US" dirty="0">
+                          <a:latin typeface="Times New Roman" panose="02020603050405020304" pitchFamily="18" charset="0"/>
+                          <a:cs typeface="Times New Roman" panose="02020603050405020304" pitchFamily="18" charset="0"/>
+                        </a:rPr>
+                        <a:t>0–10 V</a:t>
+                      </a:r>
+                    </a:p>
+                  </a:txBody>
+                  <a:tcPr/>
+                </a:tc>
+                <a:extLst>
+                  <a:ext uri="{0D108BD9-81ED-4DB2-BD59-A6C34878D82A}">
+                    <a16:rowId xmlns:a16="http://schemas.microsoft.com/office/drawing/2014/main" val="397699104"/>
+                  </a:ext>
+                </a:extLst>
+              </a:tr>
+              <a:tr h="370840">
+                <a:tc>
+                  <a:txBody>
+                    <a:bodyPr/>
+                    <a:lstStyle/>
+                    <a:p>
+                      <a:r>
+                        <a:rPr lang="en-US" dirty="0" err="1">
+                          <a:latin typeface="Times New Roman" panose="02020603050405020304" pitchFamily="18" charset="0"/>
+                          <a:cs typeface="Times New Roman" panose="02020603050405020304" pitchFamily="18" charset="0"/>
+                        </a:rPr>
+                        <a:t>Výstup</a:t>
+                      </a:r>
+                      <a:endParaRPr lang="en-US" dirty="0">
+                        <a:latin typeface="Times New Roman" panose="02020603050405020304" pitchFamily="18" charset="0"/>
+                        <a:cs typeface="Times New Roman" panose="02020603050405020304" pitchFamily="18" charset="0"/>
+                      </a:endParaRPr>
+                    </a:p>
+                  </a:txBody>
+                  <a:tcPr/>
+                </a:tc>
+                <a:tc>
+                  <a:txBody>
+                    <a:bodyPr/>
+                    <a:lstStyle/>
+                    <a:p>
+                      <a:r>
+                        <a:rPr lang="en-US" dirty="0" err="1">
+                          <a:latin typeface="Times New Roman" panose="02020603050405020304" pitchFamily="18" charset="0"/>
+                          <a:cs typeface="Times New Roman" panose="02020603050405020304" pitchFamily="18" charset="0"/>
+                        </a:rPr>
+                        <a:t>Senzor</a:t>
+                      </a:r>
+                      <a:r>
+                        <a:rPr lang="en-US" dirty="0">
+                          <a:latin typeface="Times New Roman" panose="02020603050405020304" pitchFamily="18" charset="0"/>
+                          <a:cs typeface="Times New Roman" panose="02020603050405020304" pitchFamily="18" charset="0"/>
+                        </a:rPr>
+                        <a:t> 1 (</a:t>
+                      </a:r>
+                      <a:r>
+                        <a:rPr lang="en-US" dirty="0" err="1">
+                          <a:latin typeface="Times New Roman" panose="02020603050405020304" pitchFamily="18" charset="0"/>
+                          <a:cs typeface="Times New Roman" panose="02020603050405020304" pitchFamily="18" charset="0"/>
+                        </a:rPr>
+                        <a:t>teplota</a:t>
+                      </a:r>
+                      <a:r>
+                        <a:rPr lang="en-US" dirty="0">
+                          <a:latin typeface="Times New Roman" panose="02020603050405020304" pitchFamily="18" charset="0"/>
+                          <a:cs typeface="Times New Roman" panose="02020603050405020304" pitchFamily="18" charset="0"/>
+                        </a:rPr>
+                        <a:t> 1)</a:t>
+                      </a:r>
+                    </a:p>
+                  </a:txBody>
+                  <a:tcPr/>
+                </a:tc>
+                <a:tc>
+                  <a:txBody>
+                    <a:bodyPr/>
+                    <a:lstStyle/>
+                    <a:p>
+                      <a:r>
+                        <a:rPr lang="en-US" dirty="0">
+                          <a:latin typeface="Times New Roman" panose="02020603050405020304" pitchFamily="18" charset="0"/>
+                          <a:cs typeface="Times New Roman" panose="02020603050405020304" pitchFamily="18" charset="0"/>
+                        </a:rPr>
+                        <a:t>0–10 V</a:t>
+                      </a:r>
+                    </a:p>
+                  </a:txBody>
+                  <a:tcPr/>
+                </a:tc>
+                <a:extLst>
+                  <a:ext uri="{0D108BD9-81ED-4DB2-BD59-A6C34878D82A}">
+                    <a16:rowId xmlns:a16="http://schemas.microsoft.com/office/drawing/2014/main" val="2296057303"/>
+                  </a:ext>
+                </a:extLst>
+              </a:tr>
+              <a:tr h="370840">
+                <a:tc>
+                  <a:txBody>
+                    <a:bodyPr/>
+                    <a:lstStyle/>
+                    <a:p>
+                      <a:r>
+                        <a:rPr lang="en-US" dirty="0" err="1">
+                          <a:latin typeface="Times New Roman" panose="02020603050405020304" pitchFamily="18" charset="0"/>
+                          <a:cs typeface="Times New Roman" panose="02020603050405020304" pitchFamily="18" charset="0"/>
+                        </a:rPr>
+                        <a:t>Výstup</a:t>
+                      </a:r>
+                      <a:endParaRPr lang="en-US" dirty="0">
+                        <a:latin typeface="Times New Roman" panose="02020603050405020304" pitchFamily="18" charset="0"/>
+                        <a:cs typeface="Times New Roman" panose="02020603050405020304" pitchFamily="18" charset="0"/>
+                      </a:endParaRPr>
+                    </a:p>
+                  </a:txBody>
+                  <a:tcPr/>
+                </a:tc>
+                <a:tc>
+                  <a:txBody>
+                    <a:bodyPr/>
+                    <a:lstStyle/>
+                    <a:p>
+                      <a:r>
+                        <a:rPr lang="en-US" dirty="0" err="1">
+                          <a:latin typeface="Times New Roman" panose="02020603050405020304" pitchFamily="18" charset="0"/>
+                          <a:cs typeface="Times New Roman" panose="02020603050405020304" pitchFamily="18" charset="0"/>
+                        </a:rPr>
+                        <a:t>Senzor</a:t>
+                      </a:r>
+                      <a:r>
+                        <a:rPr lang="en-US" dirty="0">
+                          <a:latin typeface="Times New Roman" panose="02020603050405020304" pitchFamily="18" charset="0"/>
+                          <a:cs typeface="Times New Roman" panose="02020603050405020304" pitchFamily="18" charset="0"/>
+                        </a:rPr>
+                        <a:t> 2 (</a:t>
+                      </a:r>
+                      <a:r>
+                        <a:rPr lang="en-US" dirty="0" err="1">
+                          <a:latin typeface="Times New Roman" panose="02020603050405020304" pitchFamily="18" charset="0"/>
+                          <a:cs typeface="Times New Roman" panose="02020603050405020304" pitchFamily="18" charset="0"/>
+                        </a:rPr>
+                        <a:t>teplota</a:t>
+                      </a:r>
+                      <a:r>
+                        <a:rPr lang="en-US" dirty="0">
+                          <a:latin typeface="Times New Roman" panose="02020603050405020304" pitchFamily="18" charset="0"/>
+                          <a:cs typeface="Times New Roman" panose="02020603050405020304" pitchFamily="18" charset="0"/>
+                        </a:rPr>
+                        <a:t> 2)</a:t>
+                      </a:r>
+                    </a:p>
+                  </a:txBody>
+                  <a:tcPr/>
+                </a:tc>
+                <a:tc>
+                  <a:txBody>
+                    <a:bodyPr/>
+                    <a:lstStyle/>
+                    <a:p>
+                      <a:r>
+                        <a:rPr lang="en-US" dirty="0">
+                          <a:latin typeface="Times New Roman" panose="02020603050405020304" pitchFamily="18" charset="0"/>
+                          <a:cs typeface="Times New Roman" panose="02020603050405020304" pitchFamily="18" charset="0"/>
+                        </a:rPr>
+                        <a:t>0–10 V</a:t>
+                      </a:r>
+                    </a:p>
+                  </a:txBody>
+                  <a:tcPr/>
+                </a:tc>
+                <a:extLst>
+                  <a:ext uri="{0D108BD9-81ED-4DB2-BD59-A6C34878D82A}">
+                    <a16:rowId xmlns:a16="http://schemas.microsoft.com/office/drawing/2014/main" val="2390220555"/>
+                  </a:ext>
+                </a:extLst>
+              </a:tr>
+            </a:tbl>
+          </a:graphicData>
+        </a:graphic>
+      </p:graphicFrame>
+      <p:pic>
+        <p:nvPicPr>
+          <p:cNvPr id="13" name="Picture 12" descr="A diagram of a computer&#10;&#10;AI-generated content may be incorrect.">
+            <a:extLst>
+              <a:ext uri="{FF2B5EF4-FFF2-40B4-BE49-F238E27FC236}">
+                <a16:creationId xmlns:a16="http://schemas.microsoft.com/office/drawing/2014/main" id="{A725C6FF-E0A2-AFFB-556A-7F22E00B39D2}"/>
+              </a:ext>
+            </a:extLst>
+          </p:cNvPr>
+          <p:cNvPicPr>
+            <a:picLocks noChangeAspect="1"/>
+          </p:cNvPicPr>
+          <p:nvPr/>
+        </p:nvPicPr>
+        <p:blipFill>
+          <a:blip r:embed="rId3"/>
+          <a:stretch>
+            <a:fillRect/>
+          </a:stretch>
+        </p:blipFill>
+        <p:spPr>
+          <a:xfrm>
+            <a:off x="6788151" y="4007364"/>
+            <a:ext cx="5156200" cy="2174838"/>
+          </a:xfrm>
+          <a:prstGeom prst="rect">
+            <a:avLst/>
+          </a:prstGeom>
+          <a:ln>
+            <a:noFill/>
+          </a:ln>
+          <a:effectLst>
+            <a:softEdge rad="112500"/>
+          </a:effectLst>
+        </p:spPr>
+      </p:pic>
+      <p:sp>
+        <p:nvSpPr>
+          <p:cNvPr id="14" name="TextBox 13">
+            <a:extLst>
+              <a:ext uri="{FF2B5EF4-FFF2-40B4-BE49-F238E27FC236}">
+                <a16:creationId xmlns:a16="http://schemas.microsoft.com/office/drawing/2014/main" id="{402F4FC1-C8E3-6437-3B02-8139A2198BB2}"/>
               </a:ext>
             </a:extLst>
           </p:cNvPr>
@@ -4202,8 +5044,8 @@
         </p:nvSpPr>
         <p:spPr>
           <a:xfrm>
-            <a:off x="2183637" y="4548037"/>
-            <a:ext cx="3480563" cy="400110"/>
+            <a:off x="1963738" y="4541361"/>
+            <a:ext cx="6213474" cy="369332"/>
           </a:xfrm>
           <a:prstGeom prst="rect">
             <a:avLst/>
@@ -4217,116 +5059,220 @@
           <a:lstStyle/>
           <a:p>
             <a:r>
-              <a:rPr lang="en-US" sz="1000" dirty="0" err="1">
+              <a:rPr lang="en-US" dirty="0" err="1">
                 <a:latin typeface="Times New Roman" panose="02020603050405020304" pitchFamily="18" charset="0"/>
                 <a:cs typeface="Times New Roman" panose="02020603050405020304" pitchFamily="18" charset="0"/>
               </a:rPr>
               <a:t>Obr</a:t>
             </a:r>
             <a:r>
-              <a:rPr lang="en-US" sz="1000" dirty="0">
+              <a:rPr lang="en-US" dirty="0">
                 <a:latin typeface="Times New Roman" panose="02020603050405020304" pitchFamily="18" charset="0"/>
                 <a:cs typeface="Times New Roman" panose="02020603050405020304" pitchFamily="18" charset="0"/>
               </a:rPr>
               <a:t>. 1: </a:t>
             </a:r>
             <a:r>
-              <a:rPr lang="en-US" sz="1000" dirty="0" err="1">
-                <a:latin typeface="Times New Roman" panose="02020603050405020304" pitchFamily="18" charset="0"/>
-                <a:cs typeface="Times New Roman" panose="02020603050405020304" pitchFamily="18" charset="0"/>
-              </a:rPr>
-              <a:t>Laboratórne</a:t>
-            </a:r>
-            <a:r>
-              <a:rPr lang="en-US" sz="1000" dirty="0">
+              <a:rPr lang="en-US" dirty="0" err="1">
+                <a:latin typeface="Times New Roman" panose="02020603050405020304" pitchFamily="18" charset="0"/>
+                <a:cs typeface="Times New Roman" panose="02020603050405020304" pitchFamily="18" charset="0"/>
+              </a:rPr>
+              <a:t>Laboratórny</a:t>
+            </a:r>
+            <a:r>
+              <a:rPr lang="en-US" dirty="0">
+                <a:latin typeface="Times New Roman" panose="02020603050405020304" pitchFamily="18" charset="0"/>
+                <a:cs typeface="Times New Roman" panose="02020603050405020304" pitchFamily="18" charset="0"/>
+              </a:rPr>
+              <a:t> model TS05 </a:t>
+            </a:r>
+          </a:p>
+        </p:txBody>
+      </p:sp>
+      <p:sp>
+        <p:nvSpPr>
+          <p:cNvPr id="15" name="TextBox 14">
+            <a:extLst>
+              <a:ext uri="{FF2B5EF4-FFF2-40B4-BE49-F238E27FC236}">
+                <a16:creationId xmlns:a16="http://schemas.microsoft.com/office/drawing/2014/main" id="{91A23EAE-B48A-044B-A176-251E3B6A886E}"/>
+              </a:ext>
+            </a:extLst>
+          </p:cNvPr>
+          <p:cNvSpPr txBox="1"/>
+          <p:nvPr/>
+        </p:nvSpPr>
+        <p:spPr>
+          <a:xfrm>
+            <a:off x="5964238" y="6166804"/>
+            <a:ext cx="6213474" cy="369332"/>
+          </a:xfrm>
+          <a:prstGeom prst="rect">
+            <a:avLst/>
+          </a:prstGeom>
+          <a:noFill/>
+        </p:spPr>
+        <p:txBody>
+          <a:bodyPr wrap="square">
+            <a:spAutoFit/>
+          </a:bodyPr>
+          <a:lstStyle/>
+          <a:p>
+            <a:r>
+              <a:rPr lang="en-US" dirty="0" err="1">
+                <a:latin typeface="Times New Roman" panose="02020603050405020304" pitchFamily="18" charset="0"/>
+                <a:cs typeface="Times New Roman" panose="02020603050405020304" pitchFamily="18" charset="0"/>
+              </a:rPr>
+              <a:t>Obr</a:t>
+            </a:r>
+            <a:r>
+              <a:rPr lang="en-US" dirty="0">
+                <a:latin typeface="Times New Roman" panose="02020603050405020304" pitchFamily="18" charset="0"/>
+                <a:cs typeface="Times New Roman" panose="02020603050405020304" pitchFamily="18" charset="0"/>
+              </a:rPr>
+              <a:t>. 2: </a:t>
+            </a:r>
+            <a:r>
+              <a:rPr lang="en-US" dirty="0" err="1">
+                <a:latin typeface="Times New Roman" panose="02020603050405020304" pitchFamily="18" charset="0"/>
+                <a:cs typeface="Times New Roman" panose="02020603050405020304" pitchFamily="18" charset="0"/>
+              </a:rPr>
+              <a:t>Simulinková</a:t>
+            </a:r>
+            <a:r>
+              <a:rPr lang="en-US" dirty="0">
                 <a:latin typeface="Times New Roman" panose="02020603050405020304" pitchFamily="18" charset="0"/>
                 <a:cs typeface="Times New Roman" panose="02020603050405020304" pitchFamily="18" charset="0"/>
               </a:rPr>
               <a:t> </a:t>
             </a:r>
             <a:r>
-              <a:rPr lang="en-US" sz="1000" dirty="0" err="1">
-                <a:latin typeface="Times New Roman" panose="02020603050405020304" pitchFamily="18" charset="0"/>
-                <a:cs typeface="Times New Roman" panose="02020603050405020304" pitchFamily="18" charset="0"/>
-              </a:rPr>
-              <a:t>zariadenie</a:t>
-            </a:r>
-            <a:r>
-              <a:rPr lang="en-US" sz="1000" dirty="0">
-                <a:latin typeface="Times New Roman" panose="02020603050405020304" pitchFamily="18" charset="0"/>
-                <a:cs typeface="Times New Roman" panose="02020603050405020304" pitchFamily="18" charset="0"/>
-              </a:rPr>
-              <a:t> TS s </a:t>
-            </a:r>
-            <a:r>
-              <a:rPr lang="en-US" sz="1000" dirty="0" err="1">
-                <a:latin typeface="Times New Roman" panose="02020603050405020304" pitchFamily="18" charset="0"/>
-                <a:cs typeface="Times New Roman" panose="02020603050405020304" pitchFamily="18" charset="0"/>
-              </a:rPr>
-              <a:t>ozna</a:t>
-            </a:r>
-            <a:r>
-              <a:rPr lang="sk-SK" sz="1000" dirty="0">
-                <a:latin typeface="Times New Roman" panose="02020603050405020304" pitchFamily="18" charset="0"/>
-                <a:cs typeface="Times New Roman" panose="02020603050405020304" pitchFamily="18" charset="0"/>
-              </a:rPr>
-              <a:t>č</a:t>
-            </a:r>
-            <a:r>
-              <a:rPr lang="en-US" sz="1000" dirty="0" err="1">
-                <a:latin typeface="Times New Roman" panose="02020603050405020304" pitchFamily="18" charset="0"/>
-                <a:cs typeface="Times New Roman" panose="02020603050405020304" pitchFamily="18" charset="0"/>
-              </a:rPr>
-              <a:t>ením</a:t>
-            </a:r>
-            <a:r>
-              <a:rPr lang="en-US" sz="1000" dirty="0">
+              <a:rPr lang="en-US" dirty="0" err="1">
+                <a:latin typeface="Times New Roman" panose="02020603050405020304" pitchFamily="18" charset="0"/>
+                <a:cs typeface="Times New Roman" panose="02020603050405020304" pitchFamily="18" charset="0"/>
+              </a:rPr>
+              <a:t>schéma</a:t>
+            </a:r>
+            <a:r>
+              <a:rPr lang="en-US" dirty="0">
+                <a:latin typeface="Times New Roman" panose="02020603050405020304" pitchFamily="18" charset="0"/>
+                <a:cs typeface="Times New Roman" panose="02020603050405020304" pitchFamily="18" charset="0"/>
+              </a:rPr>
+              <a:t> pre </a:t>
+            </a:r>
+            <a:r>
+              <a:rPr lang="en-US" dirty="0" err="1">
+                <a:latin typeface="Times New Roman" panose="02020603050405020304" pitchFamily="18" charset="0"/>
+                <a:cs typeface="Times New Roman" panose="02020603050405020304" pitchFamily="18" charset="0"/>
+              </a:rPr>
+              <a:t>komunikáciu</a:t>
+            </a:r>
+            <a:r>
+              <a:rPr lang="en-US" dirty="0">
+                <a:latin typeface="Times New Roman" panose="02020603050405020304" pitchFamily="18" charset="0"/>
+                <a:cs typeface="Times New Roman" panose="02020603050405020304" pitchFamily="18" charset="0"/>
+              </a:rPr>
+              <a:t> so </a:t>
+            </a:r>
+            <a:r>
+              <a:rPr lang="en-US" dirty="0" err="1">
+                <a:latin typeface="Times New Roman" panose="02020603050405020304" pitchFamily="18" charset="0"/>
+                <a:cs typeface="Times New Roman" panose="02020603050405020304" pitchFamily="18" charset="0"/>
+              </a:rPr>
+              <a:t>systémom</a:t>
+            </a:r>
+            <a:r>
+              <a:rPr lang="en-US" dirty="0">
+                <a:latin typeface="Times New Roman" panose="02020603050405020304" pitchFamily="18" charset="0"/>
+                <a:cs typeface="Times New Roman" panose="02020603050405020304" pitchFamily="18" charset="0"/>
+              </a:rPr>
+              <a:t> TS05</a:t>
+            </a:r>
+          </a:p>
+        </p:txBody>
+      </p:sp>
+      <p:sp>
+        <p:nvSpPr>
+          <p:cNvPr id="16" name="TextBox 15">
+            <a:extLst>
+              <a:ext uri="{FF2B5EF4-FFF2-40B4-BE49-F238E27FC236}">
+                <a16:creationId xmlns:a16="http://schemas.microsoft.com/office/drawing/2014/main" id="{82765478-9885-0D74-7C4F-4C29689C7B2B}"/>
+              </a:ext>
+            </a:extLst>
+          </p:cNvPr>
+          <p:cNvSpPr txBox="1"/>
+          <p:nvPr/>
+        </p:nvSpPr>
+        <p:spPr>
+          <a:xfrm>
+            <a:off x="6922294" y="3429000"/>
+            <a:ext cx="4297362" cy="369332"/>
+          </a:xfrm>
+          <a:prstGeom prst="rect">
+            <a:avLst/>
+          </a:prstGeom>
+          <a:noFill/>
+        </p:spPr>
+        <p:txBody>
+          <a:bodyPr wrap="square">
+            <a:spAutoFit/>
+          </a:bodyPr>
+          <a:lstStyle/>
+          <a:p>
+            <a:r>
+              <a:rPr lang="en-US" dirty="0" err="1">
+                <a:latin typeface="Times New Roman" panose="02020603050405020304" pitchFamily="18" charset="0"/>
+                <a:cs typeface="Times New Roman" panose="02020603050405020304" pitchFamily="18" charset="0"/>
+              </a:rPr>
+              <a:t>Tabuľka</a:t>
+            </a:r>
+            <a:r>
+              <a:rPr lang="en-US" dirty="0">
+                <a:latin typeface="Times New Roman" panose="02020603050405020304" pitchFamily="18" charset="0"/>
+                <a:cs typeface="Times New Roman" panose="02020603050405020304" pitchFamily="18" charset="0"/>
+              </a:rPr>
+              <a:t> 1: </a:t>
+            </a:r>
+            <a:r>
+              <a:rPr lang="en-US" dirty="0" err="1">
+                <a:latin typeface="Times New Roman" panose="02020603050405020304" pitchFamily="18" charset="0"/>
+                <a:cs typeface="Times New Roman" panose="02020603050405020304" pitchFamily="18" charset="0"/>
+              </a:rPr>
+              <a:t>Vstupy</a:t>
+            </a:r>
+            <a:r>
+              <a:rPr lang="en-US" dirty="0">
+                <a:latin typeface="Times New Roman" panose="02020603050405020304" pitchFamily="18" charset="0"/>
+                <a:cs typeface="Times New Roman" panose="02020603050405020304" pitchFamily="18" charset="0"/>
+              </a:rPr>
+              <a:t> a </a:t>
+            </a:r>
+            <a:r>
+              <a:rPr lang="en-US" dirty="0" err="1">
+                <a:latin typeface="Times New Roman" panose="02020603050405020304" pitchFamily="18" charset="0"/>
+                <a:cs typeface="Times New Roman" panose="02020603050405020304" pitchFamily="18" charset="0"/>
+              </a:rPr>
+              <a:t>výstupy</a:t>
+            </a:r>
+            <a:r>
+              <a:rPr lang="en-US" dirty="0">
                 <a:latin typeface="Times New Roman" panose="02020603050405020304" pitchFamily="18" charset="0"/>
                 <a:cs typeface="Times New Roman" panose="02020603050405020304" pitchFamily="18" charset="0"/>
               </a:rPr>
               <a:t> </a:t>
             </a:r>
             <a:r>
-              <a:rPr lang="en-US" sz="1000" dirty="0" err="1">
-                <a:latin typeface="Times New Roman" panose="02020603050405020304" pitchFamily="18" charset="0"/>
-                <a:cs typeface="Times New Roman" panose="02020603050405020304" pitchFamily="18" charset="0"/>
-              </a:rPr>
-              <a:t>jednotlivých</a:t>
-            </a:r>
-            <a:r>
-              <a:rPr lang="sk-SK" sz="1000" dirty="0">
-                <a:latin typeface="Times New Roman" panose="02020603050405020304" pitchFamily="18" charset="0"/>
-                <a:cs typeface="Times New Roman" panose="02020603050405020304" pitchFamily="18" charset="0"/>
-              </a:rPr>
-              <a:t> </a:t>
-            </a:r>
-            <a:r>
-              <a:rPr lang="en-US" sz="1000" dirty="0" err="1">
-                <a:latin typeface="Times New Roman" panose="02020603050405020304" pitchFamily="18" charset="0"/>
-                <a:cs typeface="Times New Roman" panose="02020603050405020304" pitchFamily="18" charset="0"/>
-              </a:rPr>
-              <a:t>komponentov</a:t>
-            </a:r>
-            <a:r>
-              <a:rPr lang="en-US" sz="1000" dirty="0">
-                <a:latin typeface="Times New Roman" panose="02020603050405020304" pitchFamily="18" charset="0"/>
-                <a:cs typeface="Times New Roman" panose="02020603050405020304" pitchFamily="18" charset="0"/>
-              </a:rPr>
-              <a:t> </a:t>
-            </a:r>
-            <a:r>
-              <a:rPr lang="en-US" sz="1000" dirty="0" err="1">
+              <a:rPr lang="en-US" dirty="0" err="1">
                 <a:latin typeface="Times New Roman" panose="02020603050405020304" pitchFamily="18" charset="0"/>
                 <a:cs typeface="Times New Roman" panose="02020603050405020304" pitchFamily="18" charset="0"/>
               </a:rPr>
               <a:t>systému</a:t>
             </a:r>
             <a:r>
-              <a:rPr lang="en-US" sz="1000" dirty="0">
-                <a:latin typeface="Times New Roman" panose="02020603050405020304" pitchFamily="18" charset="0"/>
-                <a:cs typeface="Times New Roman" panose="02020603050405020304" pitchFamily="18" charset="0"/>
-              </a:rPr>
-              <a:t>.</a:t>
+              <a:rPr lang="en-US" dirty="0">
+                <a:latin typeface="Times New Roman" panose="02020603050405020304" pitchFamily="18" charset="0"/>
+                <a:cs typeface="Times New Roman" panose="02020603050405020304" pitchFamily="18" charset="0"/>
+              </a:rPr>
+              <a:t> TS05</a:t>
             </a:r>
           </a:p>
         </p:txBody>
@@ -4366,15 +5312,15 @@
           <p:cNvPr id="2" name="Title 1">
             <a:extLst>
               <a:ext uri="{FF2B5EF4-FFF2-40B4-BE49-F238E27FC236}">
-                <a16:creationId xmlns:a16="http://schemas.microsoft.com/office/drawing/2014/main" id="{3D66BBDE-FC23-471C-965C-3949F221329F}"/>
-              </a:ext>
-            </a:extLst>
-          </p:cNvPr>
-          <p:cNvSpPr>
-            <a:spLocks noGrp="1"/>
-          </p:cNvSpPr>
-          <p:nvPr>
-            <p:ph type="ctrTitle"/>
+                <a16:creationId xmlns:a16="http://schemas.microsoft.com/office/drawing/2014/main" id="{5A51BD46-7204-9E5F-CDED-CAE9E300C630}"/>
+              </a:ext>
+            </a:extLst>
+          </p:cNvPr>
+          <p:cNvSpPr>
+            <a:spLocks noGrp="1"/>
+          </p:cNvSpPr>
+          <p:nvPr>
+            <p:ph type="title"/>
           </p:nvPr>
         </p:nvSpPr>
         <p:spPr/>
@@ -4383,16 +5329,24 @@
           <a:lstStyle/>
           <a:p>
             <a:r>
-              <a:rPr lang="en-US" dirty="0" err="1"/>
-              <a:t>Ďakujeme</a:t>
-            </a:r>
-            <a:r>
-              <a:rPr lang="en-US" dirty="0"/>
-              <a:t> za </a:t>
-            </a:r>
-            <a:r>
-              <a:rPr lang="en-US" dirty="0" err="1"/>
-              <a:t>pozornosť</a:t>
+              <a:rPr lang="en-US" altLang="en-US" dirty="0" err="1"/>
+              <a:t>Statické</a:t>
+            </a:r>
+            <a:r>
+              <a:rPr lang="en-US" altLang="en-US" dirty="0"/>
+              <a:t> </a:t>
+            </a:r>
+            <a:r>
+              <a:rPr lang="en-US" altLang="en-US" dirty="0" err="1"/>
+              <a:t>vlastnosti</a:t>
+            </a:r>
+            <a:r>
+              <a:rPr lang="en-US" altLang="en-US" dirty="0"/>
+              <a:t> </a:t>
+            </a:r>
+            <a:r>
+              <a:rPr lang="en-US" altLang="en-US" dirty="0" err="1"/>
+              <a:t>systému</a:t>
             </a:r>
             <a:endParaRPr lang="en-US" dirty="0"/>
           </a:p>
@@ -4400,58 +5354,10 @@
       </p:sp>
       <p:sp>
         <p:nvSpPr>
-          <p:cNvPr id="3" name="Subtitle 2">
-            <a:extLst>
-              <a:ext uri="{FF2B5EF4-FFF2-40B4-BE49-F238E27FC236}">
-                <a16:creationId xmlns:a16="http://schemas.microsoft.com/office/drawing/2014/main" id="{D7A1EBA0-A3B6-09FB-BAE8-3FF64FF566D0}"/>
-              </a:ext>
-            </a:extLst>
-          </p:cNvPr>
-          <p:cNvSpPr>
-            <a:spLocks noGrp="1"/>
-          </p:cNvSpPr>
-          <p:nvPr>
-            <p:ph type="subTitle" idx="1"/>
-          </p:nvPr>
-        </p:nvSpPr>
-        <p:spPr/>
-        <p:txBody>
-          <a:bodyPr/>
-          <a:lstStyle/>
-          <a:p>
-            <a:r>
-              <a:rPr lang="en-US" dirty="0" err="1"/>
-              <a:t>Máte</a:t>
-            </a:r>
-            <a:r>
-              <a:rPr lang="en-US" dirty="0"/>
-              <a:t> </a:t>
-            </a:r>
-            <a:r>
-              <a:rPr lang="en-US" dirty="0" err="1"/>
-              <a:t>nejaké</a:t>
-            </a:r>
-            <a:r>
-              <a:rPr lang="en-US" dirty="0"/>
-              <a:t> </a:t>
-            </a:r>
-            <a:r>
-              <a:rPr lang="en-US" dirty="0" err="1"/>
-              <a:t>otázky</a:t>
-            </a:r>
-            <a:r>
-              <a:rPr lang="en-US" dirty="0"/>
-              <a:t>?</a:t>
-            </a:r>
-          </a:p>
-        </p:txBody>
-      </p:sp>
-      <p:sp>
-        <p:nvSpPr>
           <p:cNvPr id="4" name="Slide Number Placeholder 3">
             <a:extLst>
               <a:ext uri="{FF2B5EF4-FFF2-40B4-BE49-F238E27FC236}">
-                <a16:creationId xmlns:a16="http://schemas.microsoft.com/office/drawing/2014/main" id="{664C19B4-25E5-0439-C24E-0B6A42C0B242}"/>
+                <a16:creationId xmlns:a16="http://schemas.microsoft.com/office/drawing/2014/main" id="{CB9DF7E1-2B5D-E952-E173-CA6064276A05}"/>
               </a:ext>
             </a:extLst>
           </p:cNvPr>
@@ -4470,6 +5376,1995 @@
             <a:fld id="{6CAE0FC8-C62F-4561-A15C-F1B236593633}" type="slidenum">
               <a:rPr lang="en-US" smtClean="0"/>
               <a:t>4</a:t>
+            </a:fld>
+            <a:endParaRPr lang="en-US"/>
+          </a:p>
+        </p:txBody>
+      </p:sp>
+      <p:sp>
+        <p:nvSpPr>
+          <p:cNvPr id="5" name="TextBox 4">
+            <a:extLst>
+              <a:ext uri="{FF2B5EF4-FFF2-40B4-BE49-F238E27FC236}">
+                <a16:creationId xmlns:a16="http://schemas.microsoft.com/office/drawing/2014/main" id="{D94EF39B-1E66-AD5D-A96F-983AB03FBE01}"/>
+              </a:ext>
+            </a:extLst>
+          </p:cNvPr>
+          <p:cNvSpPr txBox="1"/>
+          <p:nvPr/>
+        </p:nvSpPr>
+        <p:spPr>
+          <a:xfrm>
+            <a:off x="1019326" y="4385050"/>
+            <a:ext cx="5753386" cy="369332"/>
+          </a:xfrm>
+          <a:prstGeom prst="rect">
+            <a:avLst/>
+          </a:prstGeom>
+          <a:noFill/>
+        </p:spPr>
+        <p:txBody>
+          <a:bodyPr wrap="square">
+            <a:spAutoFit/>
+          </a:bodyPr>
+          <a:lstStyle/>
+          <a:p>
+            <a:r>
+              <a:rPr lang="en-US" dirty="0" err="1">
+                <a:latin typeface="Times New Roman" panose="02020603050405020304" pitchFamily="18" charset="0"/>
+                <a:cs typeface="Times New Roman" panose="02020603050405020304" pitchFamily="18" charset="0"/>
+              </a:rPr>
+              <a:t>Obr</a:t>
+            </a:r>
+            <a:r>
+              <a:rPr lang="en-US" dirty="0">
+                <a:latin typeface="Times New Roman" panose="02020603050405020304" pitchFamily="18" charset="0"/>
+                <a:cs typeface="Times New Roman" panose="02020603050405020304" pitchFamily="18" charset="0"/>
+              </a:rPr>
+              <a:t>. 3: </a:t>
+            </a:r>
+            <a:r>
+              <a:rPr lang="en-US" dirty="0" err="1">
+                <a:latin typeface="Times New Roman" panose="02020603050405020304" pitchFamily="18" charset="0"/>
+                <a:cs typeface="Times New Roman" panose="02020603050405020304" pitchFamily="18" charset="0"/>
+              </a:rPr>
+              <a:t>Priebeh</a:t>
+            </a:r>
+            <a:r>
+              <a:rPr lang="en-US" dirty="0">
+                <a:latin typeface="Times New Roman" panose="02020603050405020304" pitchFamily="18" charset="0"/>
+                <a:cs typeface="Times New Roman" panose="02020603050405020304" pitchFamily="18" charset="0"/>
+              </a:rPr>
+              <a:t> </a:t>
+            </a:r>
+            <a:r>
+              <a:rPr lang="en-US" dirty="0" err="1">
+                <a:latin typeface="Times New Roman" panose="02020603050405020304" pitchFamily="18" charset="0"/>
+                <a:cs typeface="Times New Roman" panose="02020603050405020304" pitchFamily="18" charset="0"/>
+              </a:rPr>
+              <a:t>napätia</a:t>
+            </a:r>
+            <a:r>
+              <a:rPr lang="en-US" dirty="0">
+                <a:latin typeface="Times New Roman" panose="02020603050405020304" pitchFamily="18" charset="0"/>
+                <a:cs typeface="Times New Roman" panose="02020603050405020304" pitchFamily="18" charset="0"/>
+              </a:rPr>
+              <a:t> </a:t>
+            </a:r>
+            <a:r>
+              <a:rPr lang="en-US" dirty="0" err="1">
+                <a:latin typeface="Times New Roman" panose="02020603050405020304" pitchFamily="18" charset="0"/>
+                <a:cs typeface="Times New Roman" panose="02020603050405020304" pitchFamily="18" charset="0"/>
+              </a:rPr>
+              <a:t>na</a:t>
+            </a:r>
+            <a:r>
+              <a:rPr lang="en-US" dirty="0">
+                <a:latin typeface="Times New Roman" panose="02020603050405020304" pitchFamily="18" charset="0"/>
+                <a:cs typeface="Times New Roman" panose="02020603050405020304" pitchFamily="18" charset="0"/>
+              </a:rPr>
+              <a:t> </a:t>
+            </a:r>
+            <a:r>
+              <a:rPr lang="en-US" dirty="0" err="1">
+                <a:latin typeface="Times New Roman" panose="02020603050405020304" pitchFamily="18" charset="0"/>
+                <a:cs typeface="Times New Roman" panose="02020603050405020304" pitchFamily="18" charset="0"/>
+              </a:rPr>
+              <a:t>špirále</a:t>
+            </a:r>
+            <a:endParaRPr lang="en-US" dirty="0">
+              <a:latin typeface="Times New Roman" panose="02020603050405020304" pitchFamily="18" charset="0"/>
+              <a:cs typeface="Times New Roman" panose="02020603050405020304" pitchFamily="18" charset="0"/>
+            </a:endParaRPr>
+          </a:p>
+        </p:txBody>
+      </p:sp>
+      <p:pic>
+        <p:nvPicPr>
+          <p:cNvPr id="6" name="Picture 5">
+            <a:extLst>
+              <a:ext uri="{FF2B5EF4-FFF2-40B4-BE49-F238E27FC236}">
+                <a16:creationId xmlns:a16="http://schemas.microsoft.com/office/drawing/2014/main" id="{B16A1C06-EB46-8AAA-F22F-80434120EA42}"/>
+              </a:ext>
+            </a:extLst>
+          </p:cNvPr>
+          <p:cNvPicPr>
+            <a:picLocks noChangeAspect="1"/>
+          </p:cNvPicPr>
+          <p:nvPr/>
+        </p:nvPicPr>
+        <p:blipFill>
+          <a:blip r:embed="rId2">
+            <a:extLst>
+              <a:ext uri="{28A0092B-C50C-407E-A947-70E740481C1C}">
+                <a14:useLocalDpi xmlns:a14="http://schemas.microsoft.com/office/drawing/2010/main" val="0"/>
+              </a:ext>
+            </a:extLst>
+          </a:blip>
+          <a:stretch>
+            <a:fillRect/>
+          </a:stretch>
+        </p:blipFill>
+        <p:spPr>
+          <a:xfrm>
+            <a:off x="5029193" y="1611130"/>
+            <a:ext cx="7089662" cy="4319025"/>
+          </a:xfrm>
+          <a:prstGeom prst="rect">
+            <a:avLst/>
+          </a:prstGeom>
+          <a:ln>
+            <a:noFill/>
+          </a:ln>
+          <a:effectLst>
+            <a:softEdge rad="112500"/>
+          </a:effectLst>
+        </p:spPr>
+      </p:pic>
+      <p:sp>
+        <p:nvSpPr>
+          <p:cNvPr id="7" name="TextBox 6">
+            <a:extLst>
+              <a:ext uri="{FF2B5EF4-FFF2-40B4-BE49-F238E27FC236}">
+                <a16:creationId xmlns:a16="http://schemas.microsoft.com/office/drawing/2014/main" id="{1A31BFDE-E187-079D-A77A-1C7F815F1B14}"/>
+              </a:ext>
+            </a:extLst>
+          </p:cNvPr>
+          <p:cNvSpPr txBox="1"/>
+          <p:nvPr/>
+        </p:nvSpPr>
+        <p:spPr>
+          <a:xfrm>
+            <a:off x="5392674" y="5815693"/>
+            <a:ext cx="6213348" cy="646331"/>
+          </a:xfrm>
+          <a:prstGeom prst="rect">
+            <a:avLst/>
+          </a:prstGeom>
+          <a:noFill/>
+        </p:spPr>
+        <p:txBody>
+          <a:bodyPr wrap="square">
+            <a:spAutoFit/>
+          </a:bodyPr>
+          <a:lstStyle/>
+          <a:p>
+            <a:r>
+              <a:rPr lang="en-US" dirty="0" err="1">
+                <a:latin typeface="Times New Roman" panose="02020603050405020304" pitchFamily="18" charset="0"/>
+                <a:cs typeface="Times New Roman" panose="02020603050405020304" pitchFamily="18" charset="0"/>
+              </a:rPr>
+              <a:t>Obr</a:t>
+            </a:r>
+            <a:r>
+              <a:rPr lang="en-US" dirty="0">
+                <a:latin typeface="Times New Roman" panose="02020603050405020304" pitchFamily="18" charset="0"/>
+                <a:cs typeface="Times New Roman" panose="02020603050405020304" pitchFamily="18" charset="0"/>
+              </a:rPr>
+              <a:t>. 8: </a:t>
+            </a:r>
+            <a:r>
+              <a:rPr lang="en-US" dirty="0" err="1">
+                <a:latin typeface="Times New Roman" panose="02020603050405020304" pitchFamily="18" charset="0"/>
+                <a:cs typeface="Times New Roman" panose="02020603050405020304" pitchFamily="18" charset="0"/>
+              </a:rPr>
+              <a:t>Prevodová</a:t>
+            </a:r>
+            <a:r>
+              <a:rPr lang="en-US" dirty="0">
+                <a:latin typeface="Times New Roman" panose="02020603050405020304" pitchFamily="18" charset="0"/>
+                <a:cs typeface="Times New Roman" panose="02020603050405020304" pitchFamily="18" charset="0"/>
+              </a:rPr>
+              <a:t> </a:t>
+            </a:r>
+            <a:r>
+              <a:rPr lang="en-US" dirty="0" err="1">
+                <a:latin typeface="Times New Roman" panose="02020603050405020304" pitchFamily="18" charset="0"/>
+                <a:cs typeface="Times New Roman" panose="02020603050405020304" pitchFamily="18" charset="0"/>
+              </a:rPr>
+              <a:t>charakteristika</a:t>
+            </a:r>
+            <a:r>
+              <a:rPr lang="en-US" dirty="0">
+                <a:latin typeface="Times New Roman" panose="02020603050405020304" pitchFamily="18" charset="0"/>
+                <a:cs typeface="Times New Roman" panose="02020603050405020304" pitchFamily="18" charset="0"/>
+              </a:rPr>
+              <a:t> </a:t>
+            </a:r>
+            <a:r>
+              <a:rPr lang="en-US" dirty="0" err="1">
+                <a:latin typeface="Times New Roman" panose="02020603050405020304" pitchFamily="18" charset="0"/>
+                <a:cs typeface="Times New Roman" panose="02020603050405020304" pitchFamily="18" charset="0"/>
+              </a:rPr>
+              <a:t>systému</a:t>
+            </a:r>
+            <a:r>
+              <a:rPr lang="en-US" dirty="0">
+                <a:latin typeface="Times New Roman" panose="02020603050405020304" pitchFamily="18" charset="0"/>
+                <a:cs typeface="Times New Roman" panose="02020603050405020304" pitchFamily="18" charset="0"/>
+              </a:rPr>
+              <a:t> TS05 pre </a:t>
+            </a:r>
+            <a:r>
+              <a:rPr lang="en-US" dirty="0" err="1">
+                <a:latin typeface="Times New Roman" panose="02020603050405020304" pitchFamily="18" charset="0"/>
+                <a:cs typeface="Times New Roman" panose="02020603050405020304" pitchFamily="18" charset="0"/>
+              </a:rPr>
+              <a:t>pracovný</a:t>
+            </a:r>
+            <a:r>
+              <a:rPr lang="en-US" dirty="0">
+                <a:latin typeface="Times New Roman" panose="02020603050405020304" pitchFamily="18" charset="0"/>
+                <a:cs typeface="Times New Roman" panose="02020603050405020304" pitchFamily="18" charset="0"/>
+              </a:rPr>
+              <a:t> bod </a:t>
+            </a:r>
+            <a:r>
+              <a:rPr lang="en-US" dirty="0" err="1">
+                <a:latin typeface="Times New Roman" panose="02020603050405020304" pitchFamily="18" charset="0"/>
+                <a:cs typeface="Times New Roman" panose="02020603050405020304" pitchFamily="18" charset="0"/>
+              </a:rPr>
+              <a:t>ventilátora</a:t>
+            </a:r>
+            <a:r>
+              <a:rPr lang="en-US" dirty="0">
+                <a:latin typeface="Times New Roman" panose="02020603050405020304" pitchFamily="18" charset="0"/>
+                <a:cs typeface="Times New Roman" panose="02020603050405020304" pitchFamily="18" charset="0"/>
+              </a:rPr>
+              <a:t> 6 V</a:t>
+            </a:r>
+          </a:p>
+        </p:txBody>
+      </p:sp>
+      <p:pic>
+        <p:nvPicPr>
+          <p:cNvPr id="8" name="Picture 7">
+            <a:extLst>
+              <a:ext uri="{FF2B5EF4-FFF2-40B4-BE49-F238E27FC236}">
+                <a16:creationId xmlns:a16="http://schemas.microsoft.com/office/drawing/2014/main" id="{4564DEFD-3682-397F-9A77-CFEE1945CEB2}"/>
+              </a:ext>
+            </a:extLst>
+          </p:cNvPr>
+          <p:cNvPicPr>
+            <a:picLocks noChangeAspect="1"/>
+          </p:cNvPicPr>
+          <p:nvPr/>
+        </p:nvPicPr>
+        <p:blipFill>
+          <a:blip r:embed="rId3">
+            <a:extLst>
+              <a:ext uri="{28A0092B-C50C-407E-A947-70E740481C1C}">
+                <a14:useLocalDpi xmlns:a14="http://schemas.microsoft.com/office/drawing/2010/main" val="0"/>
+              </a:ext>
+            </a:extLst>
+          </a:blip>
+          <a:stretch>
+            <a:fillRect/>
+          </a:stretch>
+        </p:blipFill>
+        <p:spPr>
+          <a:xfrm>
+            <a:off x="121903" y="1611130"/>
+            <a:ext cx="4907290" cy="2877318"/>
+          </a:xfrm>
+          <a:prstGeom prst="rect">
+            <a:avLst/>
+          </a:prstGeom>
+          <a:ln>
+            <a:noFill/>
+          </a:ln>
+          <a:effectLst>
+            <a:softEdge rad="112500"/>
+          </a:effectLst>
+        </p:spPr>
+      </p:pic>
+    </p:spTree>
+    <p:extLst>
+      <p:ext uri="{BB962C8B-B14F-4D97-AF65-F5344CB8AC3E}">
+        <p14:creationId xmlns:p14="http://schemas.microsoft.com/office/powerpoint/2010/main" val="2508814768"/>
+      </p:ext>
+    </p:extLst>
+  </p:cSld>
+  <p:clrMapOvr>
+    <a:masterClrMapping/>
+  </p:clrMapOvr>
+</p:sld>
+</file>
+
+<file path=ppt/slides/slide5.xml><?xml version="1.0" encoding="utf-8"?>
+<p:sld xmlns:a="http://schemas.openxmlformats.org/drawingml/2006/main" xmlns:r="http://schemas.openxmlformats.org/officeDocument/2006/relationships" xmlns:p="http://schemas.openxmlformats.org/presentationml/2006/main">
+  <p:cSld>
+    <p:spTree>
+      <p:nvGrpSpPr>
+        <p:cNvPr id="1" name=""/>
+        <p:cNvGrpSpPr/>
+        <p:nvPr/>
+      </p:nvGrpSpPr>
+      <p:grpSpPr>
+        <a:xfrm>
+          <a:off x="0" y="0"/>
+          <a:ext cx="0" cy="0"/>
+          <a:chOff x="0" y="0"/>
+          <a:chExt cx="0" cy="0"/>
+        </a:xfrm>
+      </p:grpSpPr>
+      <p:sp>
+        <p:nvSpPr>
+          <p:cNvPr id="2" name="Title 1">
+            <a:extLst>
+              <a:ext uri="{FF2B5EF4-FFF2-40B4-BE49-F238E27FC236}">
+                <a16:creationId xmlns:a16="http://schemas.microsoft.com/office/drawing/2014/main" id="{1244DAC7-6A1A-1FB6-08FD-7C2E1DAA4A31}"/>
+              </a:ext>
+            </a:extLst>
+          </p:cNvPr>
+          <p:cNvSpPr>
+            <a:spLocks noGrp="1"/>
+          </p:cNvSpPr>
+          <p:nvPr>
+            <p:ph type="title"/>
+          </p:nvPr>
+        </p:nvSpPr>
+        <p:spPr/>
+        <p:txBody>
+          <a:bodyPr>
+            <a:noAutofit/>
+          </a:bodyPr>
+          <a:lstStyle/>
+          <a:p>
+            <a:r>
+              <a:rPr lang="en-US" altLang="en-US" sz="2800" dirty="0" err="1"/>
+              <a:t>Merania</a:t>
+            </a:r>
+            <a:r>
+              <a:rPr lang="en-US" altLang="en-US" sz="2800" dirty="0"/>
+              <a:t> </a:t>
+            </a:r>
+            <a:r>
+              <a:rPr lang="en-US" altLang="en-US" sz="2800" dirty="0" err="1"/>
+              <a:t>na</a:t>
+            </a:r>
+            <a:r>
+              <a:rPr lang="en-US" altLang="en-US" sz="2800" dirty="0"/>
+              <a:t> </a:t>
+            </a:r>
+            <a:r>
+              <a:rPr lang="en-US" altLang="en-US" sz="2800" dirty="0" err="1"/>
+              <a:t>identifikáciu</a:t>
+            </a:r>
+            <a:r>
+              <a:rPr lang="en-US" altLang="en-US" sz="2800" dirty="0"/>
+              <a:t> </a:t>
+            </a:r>
+            <a:r>
+              <a:rPr lang="en-US" altLang="en-US" sz="2800" dirty="0" err="1"/>
+              <a:t>systému</a:t>
+            </a:r>
+            <a:r>
+              <a:rPr lang="en-US" altLang="en-US" sz="2800" dirty="0"/>
+              <a:t> v </a:t>
+            </a:r>
+            <a:r>
+              <a:rPr lang="en-US" altLang="en-US" sz="2800" dirty="0" err="1"/>
+              <a:t>pracovnom</a:t>
+            </a:r>
+            <a:r>
+              <a:rPr lang="en-US" altLang="en-US" sz="2800" dirty="0"/>
+              <a:t> bode: </a:t>
+            </a:r>
+            <a:br>
+              <a:rPr lang="en-US" altLang="en-US" sz="2800" dirty="0"/>
+            </a:br>
+            <a:r>
+              <a:rPr lang="en-US" altLang="en-US" sz="2800" dirty="0"/>
+              <a:t>Detrend</a:t>
+            </a:r>
+            <a:endParaRPr lang="en-US" sz="2800" dirty="0"/>
+          </a:p>
+        </p:txBody>
+      </p:sp>
+      <p:sp>
+        <p:nvSpPr>
+          <p:cNvPr id="4" name="Slide Number Placeholder 3">
+            <a:extLst>
+              <a:ext uri="{FF2B5EF4-FFF2-40B4-BE49-F238E27FC236}">
+                <a16:creationId xmlns:a16="http://schemas.microsoft.com/office/drawing/2014/main" id="{A26F4D10-DF8E-E6BA-D834-523C94499791}"/>
+              </a:ext>
+            </a:extLst>
+          </p:cNvPr>
+          <p:cNvSpPr>
+            <a:spLocks noGrp="1"/>
+          </p:cNvSpPr>
+          <p:nvPr>
+            <p:ph type="sldNum" sz="quarter" idx="12"/>
+          </p:nvPr>
+        </p:nvSpPr>
+        <p:spPr/>
+        <p:txBody>
+          <a:bodyPr/>
+          <a:lstStyle/>
+          <a:p>
+            <a:fld id="{6CAE0FC8-C62F-4561-A15C-F1B236593633}" type="slidenum">
+              <a:rPr lang="en-US" smtClean="0"/>
+              <a:t>5</a:t>
+            </a:fld>
+            <a:endParaRPr lang="en-US"/>
+          </a:p>
+        </p:txBody>
+      </p:sp>
+      <p:pic>
+        <p:nvPicPr>
+          <p:cNvPr id="5" name="Picture 4">
+            <a:extLst>
+              <a:ext uri="{FF2B5EF4-FFF2-40B4-BE49-F238E27FC236}">
+                <a16:creationId xmlns:a16="http://schemas.microsoft.com/office/drawing/2014/main" id="{7F146315-BC4D-55BD-F0D8-788CFB73A2BE}"/>
+              </a:ext>
+            </a:extLst>
+          </p:cNvPr>
+          <p:cNvPicPr>
+            <a:picLocks noChangeAspect="1"/>
+          </p:cNvPicPr>
+          <p:nvPr/>
+        </p:nvPicPr>
+        <p:blipFill>
+          <a:blip r:embed="rId2">
+            <a:extLst>
+              <a:ext uri="{28A0092B-C50C-407E-A947-70E740481C1C}">
+                <a14:useLocalDpi xmlns:a14="http://schemas.microsoft.com/office/drawing/2010/main" val="0"/>
+              </a:ext>
+            </a:extLst>
+          </a:blip>
+          <a:stretch>
+            <a:fillRect/>
+          </a:stretch>
+        </p:blipFill>
+        <p:spPr>
+          <a:xfrm>
+            <a:off x="71621" y="1699043"/>
+            <a:ext cx="5533651" cy="3348026"/>
+          </a:xfrm>
+          <a:prstGeom prst="rect">
+            <a:avLst/>
+          </a:prstGeom>
+          <a:ln>
+            <a:noFill/>
+          </a:ln>
+          <a:effectLst>
+            <a:softEdge rad="112500"/>
+          </a:effectLst>
+        </p:spPr>
+      </p:pic>
+      <p:pic>
+        <p:nvPicPr>
+          <p:cNvPr id="6" name="Picture 5">
+            <a:extLst>
+              <a:ext uri="{FF2B5EF4-FFF2-40B4-BE49-F238E27FC236}">
+                <a16:creationId xmlns:a16="http://schemas.microsoft.com/office/drawing/2014/main" id="{724B340C-87E6-3E4C-F870-655D65ADDE79}"/>
+              </a:ext>
+            </a:extLst>
+          </p:cNvPr>
+          <p:cNvPicPr>
+            <a:picLocks noChangeAspect="1"/>
+          </p:cNvPicPr>
+          <p:nvPr/>
+        </p:nvPicPr>
+        <p:blipFill>
+          <a:blip r:embed="rId3">
+            <a:extLst>
+              <a:ext uri="{28A0092B-C50C-407E-A947-70E740481C1C}">
+                <a14:useLocalDpi xmlns:a14="http://schemas.microsoft.com/office/drawing/2010/main" val="0"/>
+              </a:ext>
+            </a:extLst>
+          </a:blip>
+          <a:stretch>
+            <a:fillRect/>
+          </a:stretch>
+        </p:blipFill>
+        <p:spPr>
+          <a:xfrm>
+            <a:off x="6586728" y="1699043"/>
+            <a:ext cx="5533651" cy="3348026"/>
+          </a:xfrm>
+          <a:prstGeom prst="rect">
+            <a:avLst/>
+          </a:prstGeom>
+          <a:ln>
+            <a:noFill/>
+          </a:ln>
+          <a:effectLst>
+            <a:softEdge rad="112500"/>
+          </a:effectLst>
+        </p:spPr>
+      </p:pic>
+      <p:sp>
+        <p:nvSpPr>
+          <p:cNvPr id="7" name="Arrow: Right 6">
+            <a:extLst>
+              <a:ext uri="{FF2B5EF4-FFF2-40B4-BE49-F238E27FC236}">
+                <a16:creationId xmlns:a16="http://schemas.microsoft.com/office/drawing/2014/main" id="{F9D7B9EB-DD7B-EF77-8B71-F329392E78DF}"/>
+              </a:ext>
+            </a:extLst>
+          </p:cNvPr>
+          <p:cNvSpPr/>
+          <p:nvPr/>
+        </p:nvSpPr>
+        <p:spPr>
+          <a:xfrm>
+            <a:off x="5724144" y="3246120"/>
+            <a:ext cx="722376" cy="457200"/>
+          </a:xfrm>
+          <a:prstGeom prst="rightArrow">
+            <a:avLst/>
+          </a:prstGeom>
+        </p:spPr>
+        <p:style>
+          <a:lnRef idx="2">
+            <a:schemeClr val="accent1">
+              <a:shade val="15000"/>
+            </a:schemeClr>
+          </a:lnRef>
+          <a:fillRef idx="1">
+            <a:schemeClr val="accent1"/>
+          </a:fillRef>
+          <a:effectRef idx="0">
+            <a:schemeClr val="accent1"/>
+          </a:effectRef>
+          <a:fontRef idx="minor">
+            <a:schemeClr val="lt1"/>
+          </a:fontRef>
+        </p:style>
+        <p:txBody>
+          <a:bodyPr rtlCol="0" anchor="ctr"/>
+          <a:lstStyle/>
+          <a:p>
+            <a:pPr algn="ctr"/>
+            <a:endParaRPr lang="en-US"/>
+          </a:p>
+        </p:txBody>
+      </p:sp>
+      <p:sp>
+        <p:nvSpPr>
+          <p:cNvPr id="8" name="TextBox 7">
+            <a:extLst>
+              <a:ext uri="{FF2B5EF4-FFF2-40B4-BE49-F238E27FC236}">
+                <a16:creationId xmlns:a16="http://schemas.microsoft.com/office/drawing/2014/main" id="{0895CF46-626C-F497-3E03-ABCCFCFABED1}"/>
+              </a:ext>
+            </a:extLst>
+          </p:cNvPr>
+          <p:cNvSpPr txBox="1"/>
+          <p:nvPr/>
+        </p:nvSpPr>
+        <p:spPr>
+          <a:xfrm>
+            <a:off x="0" y="5047069"/>
+            <a:ext cx="6213348" cy="646331"/>
+          </a:xfrm>
+          <a:prstGeom prst="rect">
+            <a:avLst/>
+          </a:prstGeom>
+          <a:noFill/>
+        </p:spPr>
+        <p:txBody>
+          <a:bodyPr wrap="square">
+            <a:spAutoFit/>
+          </a:bodyPr>
+          <a:lstStyle/>
+          <a:p>
+            <a:r>
+              <a:rPr lang="en-US" dirty="0" err="1">
+                <a:latin typeface="Times New Roman" panose="02020603050405020304" pitchFamily="18" charset="0"/>
+                <a:cs typeface="Times New Roman" panose="02020603050405020304" pitchFamily="18" charset="0"/>
+              </a:rPr>
+              <a:t>Obr</a:t>
+            </a:r>
+            <a:r>
+              <a:rPr lang="en-US" dirty="0">
+                <a:latin typeface="Times New Roman" panose="02020603050405020304" pitchFamily="18" charset="0"/>
+                <a:cs typeface="Times New Roman" panose="02020603050405020304" pitchFamily="18" charset="0"/>
+              </a:rPr>
+              <a:t>. 10: </a:t>
+            </a:r>
+            <a:r>
+              <a:rPr lang="en-US" dirty="0" err="1">
+                <a:latin typeface="Times New Roman" panose="02020603050405020304" pitchFamily="18" charset="0"/>
+                <a:cs typeface="Times New Roman" panose="02020603050405020304" pitchFamily="18" charset="0"/>
+              </a:rPr>
+              <a:t>Vstupný</a:t>
+            </a:r>
+            <a:r>
+              <a:rPr lang="en-US" dirty="0">
+                <a:latin typeface="Times New Roman" panose="02020603050405020304" pitchFamily="18" charset="0"/>
+                <a:cs typeface="Times New Roman" panose="02020603050405020304" pitchFamily="18" charset="0"/>
+              </a:rPr>
+              <a:t> </a:t>
+            </a:r>
+            <a:r>
+              <a:rPr lang="en-US" dirty="0" err="1">
+                <a:latin typeface="Times New Roman" panose="02020603050405020304" pitchFamily="18" charset="0"/>
+                <a:cs typeface="Times New Roman" panose="02020603050405020304" pitchFamily="18" charset="0"/>
+              </a:rPr>
+              <a:t>signál</a:t>
+            </a:r>
+            <a:r>
+              <a:rPr lang="en-US" dirty="0">
+                <a:latin typeface="Times New Roman" panose="02020603050405020304" pitchFamily="18" charset="0"/>
+                <a:cs typeface="Times New Roman" panose="02020603050405020304" pitchFamily="18" charset="0"/>
+              </a:rPr>
+              <a:t> </a:t>
+            </a:r>
+            <a:r>
+              <a:rPr lang="en-US" dirty="0" err="1">
+                <a:latin typeface="Times New Roman" panose="02020603050405020304" pitchFamily="18" charset="0"/>
+                <a:cs typeface="Times New Roman" panose="02020603050405020304" pitchFamily="18" charset="0"/>
+              </a:rPr>
+              <a:t>špirály</a:t>
+            </a:r>
+            <a:r>
+              <a:rPr lang="en-US" dirty="0">
+                <a:latin typeface="Times New Roman" panose="02020603050405020304" pitchFamily="18" charset="0"/>
+                <a:cs typeface="Times New Roman" panose="02020603050405020304" pitchFamily="18" charset="0"/>
+              </a:rPr>
+              <a:t> a </a:t>
+            </a:r>
+            <a:r>
+              <a:rPr lang="en-US" dirty="0" err="1">
+                <a:latin typeface="Times New Roman" panose="02020603050405020304" pitchFamily="18" charset="0"/>
+                <a:cs typeface="Times New Roman" panose="02020603050405020304" pitchFamily="18" charset="0"/>
+              </a:rPr>
+              <a:t>výstup</a:t>
+            </a:r>
+            <a:r>
+              <a:rPr lang="en-US" dirty="0">
+                <a:latin typeface="Times New Roman" panose="02020603050405020304" pitchFamily="18" charset="0"/>
+                <a:cs typeface="Times New Roman" panose="02020603050405020304" pitchFamily="18" charset="0"/>
+              </a:rPr>
+              <a:t> </a:t>
+            </a:r>
+            <a:r>
+              <a:rPr lang="en-US" dirty="0" err="1">
+                <a:latin typeface="Times New Roman" panose="02020603050405020304" pitchFamily="18" charset="0"/>
+                <a:cs typeface="Times New Roman" panose="02020603050405020304" pitchFamily="18" charset="0"/>
+              </a:rPr>
+              <a:t>senzora</a:t>
+            </a:r>
+            <a:r>
+              <a:rPr lang="en-US" dirty="0">
+                <a:latin typeface="Times New Roman" panose="02020603050405020304" pitchFamily="18" charset="0"/>
+                <a:cs typeface="Times New Roman" panose="02020603050405020304" pitchFamily="18" charset="0"/>
+              </a:rPr>
+              <a:t> 1 </a:t>
+            </a:r>
+            <a:r>
+              <a:rPr lang="en-US" dirty="0" err="1">
+                <a:latin typeface="Times New Roman" panose="02020603050405020304" pitchFamily="18" charset="0"/>
+                <a:cs typeface="Times New Roman" panose="02020603050405020304" pitchFamily="18" charset="0"/>
+              </a:rPr>
+              <a:t>pri</a:t>
+            </a:r>
+            <a:r>
+              <a:rPr lang="en-US" dirty="0">
+                <a:latin typeface="Times New Roman" panose="02020603050405020304" pitchFamily="18" charset="0"/>
+                <a:cs typeface="Times New Roman" panose="02020603050405020304" pitchFamily="18" charset="0"/>
+              </a:rPr>
+              <a:t> </a:t>
+            </a:r>
+            <a:r>
+              <a:rPr lang="en-US" dirty="0" err="1">
+                <a:latin typeface="Times New Roman" panose="02020603050405020304" pitchFamily="18" charset="0"/>
+                <a:cs typeface="Times New Roman" panose="02020603050405020304" pitchFamily="18" charset="0"/>
+              </a:rPr>
+              <a:t>skokovej</a:t>
+            </a:r>
+            <a:r>
+              <a:rPr lang="en-US" dirty="0">
+                <a:latin typeface="Times New Roman" panose="02020603050405020304" pitchFamily="18" charset="0"/>
+                <a:cs typeface="Times New Roman" panose="02020603050405020304" pitchFamily="18" charset="0"/>
+              </a:rPr>
+              <a:t> </a:t>
+            </a:r>
+            <a:r>
+              <a:rPr lang="en-US" dirty="0" err="1">
+                <a:latin typeface="Times New Roman" panose="02020603050405020304" pitchFamily="18" charset="0"/>
+                <a:cs typeface="Times New Roman" panose="02020603050405020304" pitchFamily="18" charset="0"/>
+              </a:rPr>
+              <a:t>zmene</a:t>
+            </a:r>
+            <a:endParaRPr lang="en-US" dirty="0">
+              <a:latin typeface="Times New Roman" panose="02020603050405020304" pitchFamily="18" charset="0"/>
+              <a:cs typeface="Times New Roman" panose="02020603050405020304" pitchFamily="18" charset="0"/>
+            </a:endParaRPr>
+          </a:p>
+        </p:txBody>
+      </p:sp>
+      <p:sp>
+        <p:nvSpPr>
+          <p:cNvPr id="9" name="TextBox 8">
+            <a:extLst>
+              <a:ext uri="{FF2B5EF4-FFF2-40B4-BE49-F238E27FC236}">
+                <a16:creationId xmlns:a16="http://schemas.microsoft.com/office/drawing/2014/main" id="{ADB8F32F-C682-F378-41E1-BF1BDDF58F52}"/>
+              </a:ext>
+            </a:extLst>
+          </p:cNvPr>
+          <p:cNvSpPr txBox="1"/>
+          <p:nvPr/>
+        </p:nvSpPr>
+        <p:spPr>
+          <a:xfrm>
+            <a:off x="6153912" y="5047068"/>
+            <a:ext cx="6213348" cy="646331"/>
+          </a:xfrm>
+          <a:prstGeom prst="rect">
+            <a:avLst/>
+          </a:prstGeom>
+          <a:noFill/>
+        </p:spPr>
+        <p:txBody>
+          <a:bodyPr wrap="square">
+            <a:spAutoFit/>
+          </a:bodyPr>
+          <a:lstStyle/>
+          <a:p>
+            <a:r>
+              <a:rPr lang="en-US" dirty="0" err="1">
+                <a:latin typeface="Times New Roman" panose="02020603050405020304" pitchFamily="18" charset="0"/>
+                <a:cs typeface="Times New Roman" panose="02020603050405020304" pitchFamily="18" charset="0"/>
+              </a:rPr>
+              <a:t>Obr</a:t>
+            </a:r>
+            <a:r>
+              <a:rPr lang="en-US" dirty="0">
+                <a:latin typeface="Times New Roman" panose="02020603050405020304" pitchFamily="18" charset="0"/>
+                <a:cs typeface="Times New Roman" panose="02020603050405020304" pitchFamily="18" charset="0"/>
+              </a:rPr>
+              <a:t>. 11: </a:t>
+            </a:r>
+            <a:r>
+              <a:rPr lang="en-US" dirty="0" err="1">
+                <a:latin typeface="Times New Roman" panose="02020603050405020304" pitchFamily="18" charset="0"/>
+                <a:cs typeface="Times New Roman" panose="02020603050405020304" pitchFamily="18" charset="0"/>
+              </a:rPr>
+              <a:t>Normalizované</a:t>
+            </a:r>
+            <a:r>
+              <a:rPr lang="en-US" dirty="0">
+                <a:latin typeface="Times New Roman" panose="02020603050405020304" pitchFamily="18" charset="0"/>
+                <a:cs typeface="Times New Roman" panose="02020603050405020304" pitchFamily="18" charset="0"/>
+              </a:rPr>
+              <a:t> a </a:t>
+            </a:r>
+            <a:r>
+              <a:rPr lang="en-US" dirty="0" err="1">
+                <a:latin typeface="Times New Roman" panose="02020603050405020304" pitchFamily="18" charset="0"/>
+                <a:cs typeface="Times New Roman" panose="02020603050405020304" pitchFamily="18" charset="0"/>
+              </a:rPr>
+              <a:t>detrendované</a:t>
+            </a:r>
+            <a:r>
+              <a:rPr lang="en-US" dirty="0">
+                <a:latin typeface="Times New Roman" panose="02020603050405020304" pitchFamily="18" charset="0"/>
+                <a:cs typeface="Times New Roman" panose="02020603050405020304" pitchFamily="18" charset="0"/>
+              </a:rPr>
+              <a:t> </a:t>
+            </a:r>
+            <a:r>
+              <a:rPr lang="en-US" dirty="0" err="1">
+                <a:latin typeface="Times New Roman" panose="02020603050405020304" pitchFamily="18" charset="0"/>
+                <a:cs typeface="Times New Roman" panose="02020603050405020304" pitchFamily="18" charset="0"/>
+              </a:rPr>
+              <a:t>priebehy</a:t>
+            </a:r>
+            <a:r>
+              <a:rPr lang="en-US" dirty="0">
+                <a:latin typeface="Times New Roman" panose="02020603050405020304" pitchFamily="18" charset="0"/>
+                <a:cs typeface="Times New Roman" panose="02020603050405020304" pitchFamily="18" charset="0"/>
+              </a:rPr>
+              <a:t> </a:t>
+            </a:r>
+            <a:r>
+              <a:rPr lang="en-US" dirty="0" err="1">
+                <a:latin typeface="Times New Roman" panose="02020603050405020304" pitchFamily="18" charset="0"/>
+                <a:cs typeface="Times New Roman" panose="02020603050405020304" pitchFamily="18" charset="0"/>
+              </a:rPr>
+              <a:t>vstupného</a:t>
+            </a:r>
+            <a:r>
+              <a:rPr lang="en-US" dirty="0">
+                <a:latin typeface="Times New Roman" panose="02020603050405020304" pitchFamily="18" charset="0"/>
+                <a:cs typeface="Times New Roman" panose="02020603050405020304" pitchFamily="18" charset="0"/>
+              </a:rPr>
+              <a:t> a </a:t>
+            </a:r>
+            <a:r>
+              <a:rPr lang="en-US" dirty="0" err="1">
+                <a:latin typeface="Times New Roman" panose="02020603050405020304" pitchFamily="18" charset="0"/>
+                <a:cs typeface="Times New Roman" panose="02020603050405020304" pitchFamily="18" charset="0"/>
+              </a:rPr>
+              <a:t>výstupného</a:t>
+            </a:r>
+            <a:r>
+              <a:rPr lang="en-US" dirty="0">
+                <a:latin typeface="Times New Roman" panose="02020603050405020304" pitchFamily="18" charset="0"/>
+                <a:cs typeface="Times New Roman" panose="02020603050405020304" pitchFamily="18" charset="0"/>
+              </a:rPr>
+              <a:t> </a:t>
+            </a:r>
+            <a:r>
+              <a:rPr lang="en-US" dirty="0" err="1">
+                <a:latin typeface="Times New Roman" panose="02020603050405020304" pitchFamily="18" charset="0"/>
+                <a:cs typeface="Times New Roman" panose="02020603050405020304" pitchFamily="18" charset="0"/>
+              </a:rPr>
+              <a:t>signálu</a:t>
+            </a:r>
+            <a:endParaRPr lang="en-US" dirty="0">
+              <a:latin typeface="Times New Roman" panose="02020603050405020304" pitchFamily="18" charset="0"/>
+              <a:cs typeface="Times New Roman" panose="02020603050405020304" pitchFamily="18" charset="0"/>
+            </a:endParaRPr>
+          </a:p>
+        </p:txBody>
+      </p:sp>
+    </p:spTree>
+    <p:extLst>
+      <p:ext uri="{BB962C8B-B14F-4D97-AF65-F5344CB8AC3E}">
+        <p14:creationId xmlns:p14="http://schemas.microsoft.com/office/powerpoint/2010/main" val="3886760868"/>
+      </p:ext>
+    </p:extLst>
+  </p:cSld>
+  <p:clrMapOvr>
+    <a:masterClrMapping/>
+  </p:clrMapOvr>
+</p:sld>
+</file>
+
+<file path=ppt/slides/slide6.xml><?xml version="1.0" encoding="utf-8"?>
+<p:sld xmlns:a="http://schemas.openxmlformats.org/drawingml/2006/main" xmlns:r="http://schemas.openxmlformats.org/officeDocument/2006/relationships" xmlns:p="http://schemas.openxmlformats.org/presentationml/2006/main">
+  <p:cSld>
+    <p:spTree>
+      <p:nvGrpSpPr>
+        <p:cNvPr id="1" name=""/>
+        <p:cNvGrpSpPr/>
+        <p:nvPr/>
+      </p:nvGrpSpPr>
+      <p:grpSpPr>
+        <a:xfrm>
+          <a:off x="0" y="0"/>
+          <a:ext cx="0" cy="0"/>
+          <a:chOff x="0" y="0"/>
+          <a:chExt cx="0" cy="0"/>
+        </a:xfrm>
+      </p:grpSpPr>
+      <p:sp>
+        <p:nvSpPr>
+          <p:cNvPr id="2" name="Title 1">
+            <a:extLst>
+              <a:ext uri="{FF2B5EF4-FFF2-40B4-BE49-F238E27FC236}">
+                <a16:creationId xmlns:a16="http://schemas.microsoft.com/office/drawing/2014/main" id="{7D3C06BC-A289-B761-999E-AFA1E0C780FD}"/>
+              </a:ext>
+            </a:extLst>
+          </p:cNvPr>
+          <p:cNvSpPr>
+            <a:spLocks noGrp="1"/>
+          </p:cNvSpPr>
+          <p:nvPr>
+            <p:ph type="title"/>
+          </p:nvPr>
+        </p:nvSpPr>
+        <p:spPr/>
+        <p:txBody>
+          <a:bodyPr>
+            <a:noAutofit/>
+          </a:bodyPr>
+          <a:lstStyle/>
+          <a:p>
+            <a:r>
+              <a:rPr lang="en-US" altLang="en-US" sz="2800" dirty="0" err="1"/>
+              <a:t>Merania</a:t>
+            </a:r>
+            <a:r>
+              <a:rPr lang="en-US" altLang="en-US" sz="2800" dirty="0"/>
+              <a:t> </a:t>
+            </a:r>
+            <a:r>
+              <a:rPr lang="en-US" altLang="en-US" sz="2800" dirty="0" err="1"/>
+              <a:t>na</a:t>
+            </a:r>
+            <a:r>
+              <a:rPr lang="en-US" altLang="en-US" sz="2800" dirty="0"/>
+              <a:t> </a:t>
+            </a:r>
+            <a:r>
+              <a:rPr lang="en-US" altLang="en-US" sz="2800" dirty="0" err="1"/>
+              <a:t>identifikáciu</a:t>
+            </a:r>
+            <a:r>
+              <a:rPr lang="en-US" altLang="en-US" sz="2800" dirty="0"/>
+              <a:t> </a:t>
+            </a:r>
+            <a:r>
+              <a:rPr lang="en-US" altLang="en-US" sz="2800" dirty="0" err="1"/>
+              <a:t>systému</a:t>
+            </a:r>
+            <a:r>
+              <a:rPr lang="en-US" altLang="en-US" sz="2800" dirty="0"/>
+              <a:t> v </a:t>
+            </a:r>
+            <a:r>
+              <a:rPr lang="en-US" altLang="en-US" sz="2800" dirty="0" err="1"/>
+              <a:t>pracovnom</a:t>
+            </a:r>
+            <a:r>
+              <a:rPr lang="en-US" altLang="en-US" sz="2800" dirty="0"/>
+              <a:t> bode: </a:t>
+            </a:r>
+            <a:br>
+              <a:rPr lang="en-US" altLang="en-US" sz="2800" dirty="0"/>
+            </a:br>
+            <a:r>
+              <a:rPr lang="en-US" sz="2800" dirty="0" err="1"/>
+              <a:t>Prechodová</a:t>
+            </a:r>
+            <a:r>
+              <a:rPr lang="en-US" sz="2800" dirty="0"/>
+              <a:t> </a:t>
+            </a:r>
+            <a:r>
+              <a:rPr lang="en-US" sz="2800" dirty="0" err="1"/>
+              <a:t>charakteristika</a:t>
+            </a:r>
+            <a:endParaRPr lang="en-US" sz="2800" dirty="0"/>
+          </a:p>
+        </p:txBody>
+      </p:sp>
+      <p:sp>
+        <p:nvSpPr>
+          <p:cNvPr id="4" name="Slide Number Placeholder 3">
+            <a:extLst>
+              <a:ext uri="{FF2B5EF4-FFF2-40B4-BE49-F238E27FC236}">
+                <a16:creationId xmlns:a16="http://schemas.microsoft.com/office/drawing/2014/main" id="{9E758F01-AC3C-B191-ED81-B6F860BF1078}"/>
+              </a:ext>
+            </a:extLst>
+          </p:cNvPr>
+          <p:cNvSpPr>
+            <a:spLocks noGrp="1"/>
+          </p:cNvSpPr>
+          <p:nvPr>
+            <p:ph type="sldNum" sz="quarter" idx="12"/>
+          </p:nvPr>
+        </p:nvSpPr>
+        <p:spPr/>
+        <p:txBody>
+          <a:bodyPr/>
+          <a:lstStyle/>
+          <a:p>
+            <a:fld id="{6CAE0FC8-C62F-4561-A15C-F1B236593633}" type="slidenum">
+              <a:rPr lang="en-US" smtClean="0"/>
+              <a:t>6</a:t>
+            </a:fld>
+            <a:endParaRPr lang="en-US"/>
+          </a:p>
+        </p:txBody>
+      </p:sp>
+      <p:pic>
+        <p:nvPicPr>
+          <p:cNvPr id="5" name="Picture 4">
+            <a:extLst>
+              <a:ext uri="{FF2B5EF4-FFF2-40B4-BE49-F238E27FC236}">
+                <a16:creationId xmlns:a16="http://schemas.microsoft.com/office/drawing/2014/main" id="{95CA4CA9-3F29-893F-BAE0-D191A8E7DA89}"/>
+              </a:ext>
+            </a:extLst>
+          </p:cNvPr>
+          <p:cNvPicPr>
+            <a:picLocks noChangeAspect="1"/>
+          </p:cNvPicPr>
+          <p:nvPr/>
+        </p:nvPicPr>
+        <p:blipFill>
+          <a:blip r:embed="rId2">
+            <a:extLst>
+              <a:ext uri="{28A0092B-C50C-407E-A947-70E740481C1C}">
+                <a14:useLocalDpi xmlns:a14="http://schemas.microsoft.com/office/drawing/2010/main" val="0"/>
+              </a:ext>
+            </a:extLst>
+          </a:blip>
+          <a:stretch>
+            <a:fillRect/>
+          </a:stretch>
+        </p:blipFill>
+        <p:spPr>
+          <a:xfrm>
+            <a:off x="2990084" y="1699043"/>
+            <a:ext cx="6211831" cy="4414513"/>
+          </a:xfrm>
+          <a:prstGeom prst="rect">
+            <a:avLst/>
+          </a:prstGeom>
+          <a:ln>
+            <a:noFill/>
+          </a:ln>
+          <a:effectLst>
+            <a:softEdge rad="112500"/>
+          </a:effectLst>
+        </p:spPr>
+      </p:pic>
+      <p:sp>
+        <p:nvSpPr>
+          <p:cNvPr id="6" name="TextBox 5">
+            <a:extLst>
+              <a:ext uri="{FF2B5EF4-FFF2-40B4-BE49-F238E27FC236}">
+                <a16:creationId xmlns:a16="http://schemas.microsoft.com/office/drawing/2014/main" id="{E988000D-9D23-ABD5-F233-DEB9B50EC853}"/>
+              </a:ext>
+            </a:extLst>
+          </p:cNvPr>
+          <p:cNvSpPr txBox="1"/>
+          <p:nvPr/>
+        </p:nvSpPr>
+        <p:spPr>
+          <a:xfrm>
+            <a:off x="2990084" y="6051509"/>
+            <a:ext cx="6213348" cy="369332"/>
+          </a:xfrm>
+          <a:prstGeom prst="rect">
+            <a:avLst/>
+          </a:prstGeom>
+          <a:noFill/>
+        </p:spPr>
+        <p:txBody>
+          <a:bodyPr wrap="square">
+            <a:spAutoFit/>
+          </a:bodyPr>
+          <a:lstStyle/>
+          <a:p>
+            <a:r>
+              <a:rPr lang="en-US" dirty="0" err="1">
+                <a:latin typeface="Times New Roman" panose="02020603050405020304" pitchFamily="18" charset="0"/>
+                <a:cs typeface="Times New Roman" panose="02020603050405020304" pitchFamily="18" charset="0"/>
+              </a:rPr>
+              <a:t>Obr</a:t>
+            </a:r>
+            <a:r>
+              <a:rPr lang="en-US" dirty="0">
+                <a:latin typeface="Times New Roman" panose="02020603050405020304" pitchFamily="18" charset="0"/>
+                <a:cs typeface="Times New Roman" panose="02020603050405020304" pitchFamily="18" charset="0"/>
+              </a:rPr>
+              <a:t>. 12: </a:t>
+            </a:r>
+            <a:r>
+              <a:rPr lang="en-US" dirty="0" err="1">
+                <a:latin typeface="Times New Roman" panose="02020603050405020304" pitchFamily="18" charset="0"/>
+                <a:cs typeface="Times New Roman" panose="02020603050405020304" pitchFamily="18" charset="0"/>
+              </a:rPr>
+              <a:t>Priemerná</a:t>
+            </a:r>
+            <a:r>
+              <a:rPr lang="en-US" dirty="0">
+                <a:latin typeface="Times New Roman" panose="02020603050405020304" pitchFamily="18" charset="0"/>
+                <a:cs typeface="Times New Roman" panose="02020603050405020304" pitchFamily="18" charset="0"/>
+              </a:rPr>
+              <a:t> </a:t>
+            </a:r>
+            <a:r>
+              <a:rPr lang="en-US" dirty="0" err="1">
+                <a:latin typeface="Times New Roman" panose="02020603050405020304" pitchFamily="18" charset="0"/>
+                <a:cs typeface="Times New Roman" panose="02020603050405020304" pitchFamily="18" charset="0"/>
+              </a:rPr>
+              <a:t>odozva</a:t>
+            </a:r>
+            <a:r>
+              <a:rPr lang="en-US" dirty="0">
+                <a:latin typeface="Times New Roman" panose="02020603050405020304" pitchFamily="18" charset="0"/>
+                <a:cs typeface="Times New Roman" panose="02020603050405020304" pitchFamily="18" charset="0"/>
+              </a:rPr>
+              <a:t> </a:t>
+            </a:r>
+            <a:r>
+              <a:rPr lang="en-US" dirty="0" err="1">
+                <a:latin typeface="Times New Roman" panose="02020603050405020304" pitchFamily="18" charset="0"/>
+                <a:cs typeface="Times New Roman" panose="02020603050405020304" pitchFamily="18" charset="0"/>
+              </a:rPr>
+              <a:t>systému</a:t>
+            </a:r>
+            <a:r>
+              <a:rPr lang="en-US" dirty="0">
+                <a:latin typeface="Times New Roman" panose="02020603050405020304" pitchFamily="18" charset="0"/>
+                <a:cs typeface="Times New Roman" panose="02020603050405020304" pitchFamily="18" charset="0"/>
+              </a:rPr>
+              <a:t> TS05 v </a:t>
+            </a:r>
+            <a:r>
+              <a:rPr lang="en-US" dirty="0" err="1">
+                <a:latin typeface="Times New Roman" panose="02020603050405020304" pitchFamily="18" charset="0"/>
+                <a:cs typeface="Times New Roman" panose="02020603050405020304" pitchFamily="18" charset="0"/>
+              </a:rPr>
+              <a:t>pracovnom</a:t>
+            </a:r>
+            <a:r>
+              <a:rPr lang="en-US" dirty="0">
+                <a:latin typeface="Times New Roman" panose="02020603050405020304" pitchFamily="18" charset="0"/>
+                <a:cs typeface="Times New Roman" panose="02020603050405020304" pitchFamily="18" charset="0"/>
+              </a:rPr>
+              <a:t> bode 4 V</a:t>
+            </a:r>
+          </a:p>
+        </p:txBody>
+      </p:sp>
+    </p:spTree>
+    <p:extLst>
+      <p:ext uri="{BB962C8B-B14F-4D97-AF65-F5344CB8AC3E}">
+        <p14:creationId xmlns:p14="http://schemas.microsoft.com/office/powerpoint/2010/main" val="1419360558"/>
+      </p:ext>
+    </p:extLst>
+  </p:cSld>
+  <p:clrMapOvr>
+    <a:masterClrMapping/>
+  </p:clrMapOvr>
+</p:sld>
+</file>
+
+<file path=ppt/slides/slide7.xml><?xml version="1.0" encoding="utf-8"?>
+<p:sld xmlns:a="http://schemas.openxmlformats.org/drawingml/2006/main" xmlns:r="http://schemas.openxmlformats.org/officeDocument/2006/relationships" xmlns:p="http://schemas.openxmlformats.org/presentationml/2006/main">
+  <p:cSld>
+    <p:spTree>
+      <p:nvGrpSpPr>
+        <p:cNvPr id="1" name=""/>
+        <p:cNvGrpSpPr/>
+        <p:nvPr/>
+      </p:nvGrpSpPr>
+      <p:grpSpPr>
+        <a:xfrm>
+          <a:off x="0" y="0"/>
+          <a:ext cx="0" cy="0"/>
+          <a:chOff x="0" y="0"/>
+          <a:chExt cx="0" cy="0"/>
+        </a:xfrm>
+      </p:grpSpPr>
+      <p:sp>
+        <p:nvSpPr>
+          <p:cNvPr id="2" name="Slide Number Placeholder 1">
+            <a:extLst>
+              <a:ext uri="{FF2B5EF4-FFF2-40B4-BE49-F238E27FC236}">
+                <a16:creationId xmlns:a16="http://schemas.microsoft.com/office/drawing/2014/main" id="{EE1FBDE5-827B-1D4B-26B5-A54EFF3BCD57}"/>
+              </a:ext>
+            </a:extLst>
+          </p:cNvPr>
+          <p:cNvSpPr>
+            <a:spLocks noGrp="1"/>
+          </p:cNvSpPr>
+          <p:nvPr>
+            <p:ph type="sldNum" sz="quarter" idx="12"/>
+          </p:nvPr>
+        </p:nvSpPr>
+        <p:spPr/>
+        <p:txBody>
+          <a:bodyPr/>
+          <a:lstStyle/>
+          <a:p>
+            <a:fld id="{6CAE0FC8-C62F-4561-A15C-F1B236593633}" type="slidenum">
+              <a:rPr lang="en-US" smtClean="0"/>
+              <a:t>7</a:t>
+            </a:fld>
+            <a:endParaRPr lang="en-US"/>
+          </a:p>
+        </p:txBody>
+      </p:sp>
+      <mc:AlternateContent xmlns:mc="http://schemas.openxmlformats.org/markup-compatibility/2006">
+        <mc:Choice xmlns:a14="http://schemas.microsoft.com/office/drawing/2010/main" Requires="a14">
+          <p:sp>
+            <p:nvSpPr>
+              <p:cNvPr id="3" name="Rectangle 1">
+                <a:extLst>
+                  <a:ext uri="{FF2B5EF4-FFF2-40B4-BE49-F238E27FC236}">
+                    <a16:creationId xmlns:a16="http://schemas.microsoft.com/office/drawing/2014/main" id="{1CB9D532-6FCA-F26E-E102-8EEBC0ABC818}"/>
+                  </a:ext>
+                </a:extLst>
+              </p:cNvPr>
+              <p:cNvSpPr txBox="1">
+                <a:spLocks noChangeArrowheads="1"/>
+              </p:cNvSpPr>
+              <p:nvPr/>
+            </p:nvSpPr>
+            <p:spPr bwMode="auto">
+              <a:xfrm>
+                <a:off x="472440" y="621825"/>
+                <a:ext cx="10856976" cy="1077218"/>
+              </a:xfrm>
+              <a:prstGeom prst="rect">
+                <a:avLst/>
+              </a:prstGeom>
+              <a:noFill/>
+              <a:ln>
+                <a:noFill/>
+              </a:ln>
+              <a:effectLst/>
+              <a:extLst>
+                <a:ext uri="{909E8E84-426E-40DD-AFC4-6F175D3DCCD1}">
+                  <a14:hiddenFill>
+                    <a:solidFill>
+                      <a:schemeClr val="accent1"/>
+                    </a:solidFill>
+                  </a14:hiddenFill>
+                </a:ext>
+                <a:ext uri="{91240B29-F687-4F45-9708-019B960494DF}">
+                  <a14:hiddenLine w="9525">
+                    <a:solidFill>
+                      <a:schemeClr val="tx1"/>
+                    </a:solidFill>
+                    <a:miter lim="800000"/>
+                    <a:headEnd/>
+                    <a:tailEnd/>
+                  </a14:hiddenLine>
+                </a:ext>
+                <a:ext uri="{AF507438-7753-43E0-B8FC-AC1667EBCBE1}">
+                  <a14:hiddenEffects>
+                    <a:effectLst>
+                      <a:outerShdw dist="35921" dir="2700000" algn="ctr" rotWithShape="0">
+                        <a:schemeClr val="bg2"/>
+                      </a:outerShdw>
+                    </a:effectLst>
+                  </a14:hiddenEffects>
+                </a:ext>
+              </a:extLst>
+            </p:spPr>
+            <p:txBody>
+              <a:bodyPr vert="horz" wrap="square" lIns="91440" tIns="45720" rIns="91440" bIns="45720" numCol="1" anchor="ctr" anchorCtr="0" compatLnSpc="1">
+                <a:prstTxWarp prst="textNoShape">
+                  <a:avLst/>
+                </a:prstTxWarp>
+                <a:spAutoFit/>
+              </a:bodyPr>
+              <a:lstStyle>
+                <a:lvl1pPr algn="l" defTabSz="914400" rtl="0" eaLnBrk="1" latinLnBrk="0" hangingPunct="1">
+                  <a:lnSpc>
+                    <a:spcPct val="90000"/>
+                  </a:lnSpc>
+                  <a:spcBef>
+                    <a:spcPct val="0"/>
+                  </a:spcBef>
+                  <a:buNone/>
+                  <a:defRPr sz="4400" kern="1200">
+                    <a:solidFill>
+                      <a:schemeClr val="tx1"/>
+                    </a:solidFill>
+                    <a:latin typeface="Abadi" panose="020B0604020104020204" pitchFamily="34" charset="0"/>
+                    <a:ea typeface="+mj-ea"/>
+                    <a:cs typeface="Times New Roman" panose="02020603050405020304" pitchFamily="18" charset="0"/>
+                  </a:defRPr>
+                </a:lvl1pPr>
+              </a:lstStyle>
+              <a:p>
+                <a:pPr eaLnBrk="0" fontAlgn="base" hangingPunct="0">
+                  <a:lnSpc>
+                    <a:spcPct val="100000"/>
+                  </a:lnSpc>
+                  <a:spcAft>
+                    <a:spcPct val="0"/>
+                  </a:spcAft>
+                </a:pPr>
+                <a:r>
+                  <a:rPr lang="en-US" altLang="en-US" sz="3200" dirty="0" err="1">
+                    <a:latin typeface="Times New Roman" panose="02020603050405020304" pitchFamily="18" charset="0"/>
+                  </a:rPr>
+                  <a:t>Identifikácia</a:t>
+                </a:r>
+                <a:r>
+                  <a:rPr lang="en-US" altLang="en-US" sz="3200" dirty="0">
+                    <a:latin typeface="Times New Roman" panose="02020603050405020304" pitchFamily="18" charset="0"/>
+                  </a:rPr>
+                  <a:t> </a:t>
+                </a:r>
+                <a:r>
+                  <a:rPr lang="en-US" altLang="en-US" sz="3200" dirty="0" err="1">
+                    <a:latin typeface="Times New Roman" panose="02020603050405020304" pitchFamily="18" charset="0"/>
+                  </a:rPr>
+                  <a:t>systému</a:t>
+                </a:r>
+                <a:r>
+                  <a:rPr lang="en-US" altLang="en-US" sz="3200" dirty="0">
+                    <a:latin typeface="Times New Roman" panose="02020603050405020304" pitchFamily="18" charset="0"/>
+                  </a:rPr>
+                  <a:t> v </a:t>
+                </a:r>
+                <a:r>
+                  <a:rPr lang="en-US" altLang="en-US" sz="3200" dirty="0" err="1">
+                    <a:latin typeface="Times New Roman" panose="02020603050405020304" pitchFamily="18" charset="0"/>
+                  </a:rPr>
+                  <a:t>pracovnom</a:t>
+                </a:r>
+                <a:r>
+                  <a:rPr lang="en-US" altLang="en-US" sz="3200" dirty="0">
+                    <a:latin typeface="Times New Roman" panose="02020603050405020304" pitchFamily="18" charset="0"/>
+                  </a:rPr>
+                  <a:t> bode: </a:t>
+                </a:r>
+                <a:br>
+                  <a:rPr lang="en-US" altLang="en-US" sz="3200" dirty="0">
+                    <a:latin typeface="Times New Roman" panose="02020603050405020304" pitchFamily="18" charset="0"/>
+                  </a:rPr>
+                </a:br>
+                <a:r>
+                  <a:rPr lang="en-US" altLang="en-US" sz="3200" dirty="0">
+                    <a:latin typeface="Times New Roman" panose="02020603050405020304" pitchFamily="18" charset="0"/>
+                  </a:rPr>
+                  <a:t>ventilator – 6V, u (</a:t>
+                </a:r>
+                <a:r>
+                  <a:rPr lang="en-US" altLang="en-US" sz="3200" dirty="0" err="1">
+                    <a:latin typeface="Times New Roman" panose="02020603050405020304" pitchFamily="18" charset="0"/>
+                  </a:rPr>
+                  <a:t>špirála</a:t>
+                </a:r>
+                <a:r>
+                  <a:rPr lang="en-US" altLang="en-US" sz="3200" dirty="0">
+                    <a:latin typeface="Times New Roman" panose="02020603050405020304" pitchFamily="18" charset="0"/>
+                  </a:rPr>
+                  <a:t>) – 4V, </a:t>
+                </a:r>
+                <a14:m>
+                  <m:oMath xmlns:m="http://schemas.openxmlformats.org/officeDocument/2006/math">
+                    <m:r>
+                      <a:rPr lang="en-US" altLang="en-US" sz="3200" i="1" smtClean="0">
+                        <a:latin typeface="Cambria Math" panose="02040503050406030204" pitchFamily="18" charset="0"/>
+                        <a:ea typeface="Cambria Math" panose="02040503050406030204" pitchFamily="18" charset="0"/>
+                      </a:rPr>
+                      <m:t>∆</m:t>
+                    </m:r>
+                    <m:r>
+                      <a:rPr lang="en-US" altLang="en-US" sz="3200" i="1" smtClean="0">
+                        <a:latin typeface="Cambria Math" panose="02040503050406030204" pitchFamily="18" charset="0"/>
+                        <a:ea typeface="Cambria Math" panose="02040503050406030204" pitchFamily="18" charset="0"/>
+                      </a:rPr>
+                      <m:t>𝑢</m:t>
+                    </m:r>
+                    <m:r>
+                      <a:rPr lang="en-US" altLang="en-US" sz="3200" i="1" smtClean="0">
+                        <a:latin typeface="Cambria Math" panose="02040503050406030204" pitchFamily="18" charset="0"/>
+                        <a:ea typeface="Cambria Math" panose="02040503050406030204" pitchFamily="18" charset="0"/>
+                      </a:rPr>
+                      <m:t>=0.5</m:t>
+                    </m:r>
+                    <m:r>
+                      <a:rPr lang="en-US" altLang="en-US" sz="3200" i="1" smtClean="0">
+                        <a:latin typeface="Cambria Math" panose="02040503050406030204" pitchFamily="18" charset="0"/>
+                        <a:ea typeface="Cambria Math" panose="02040503050406030204" pitchFamily="18" charset="0"/>
+                      </a:rPr>
+                      <m:t>𝑉</m:t>
+                    </m:r>
+                  </m:oMath>
+                </a14:m>
+                <a:endParaRPr lang="en-US" altLang="en-US" sz="3200" dirty="0">
+                  <a:latin typeface="Times New Roman" panose="02020603050405020304" pitchFamily="18" charset="0"/>
+                </a:endParaRPr>
+              </a:p>
+            </p:txBody>
+          </p:sp>
+        </mc:Choice>
+        <mc:Fallback>
+          <p:sp>
+            <p:nvSpPr>
+              <p:cNvPr id="3" name="Rectangle 1">
+                <a:extLst>
+                  <a:ext uri="{FF2B5EF4-FFF2-40B4-BE49-F238E27FC236}">
+                    <a16:creationId xmlns:a16="http://schemas.microsoft.com/office/drawing/2014/main" id="{1CB9D532-6FCA-F26E-E102-8EEBC0ABC818}"/>
+                  </a:ext>
+                </a:extLst>
+              </p:cNvPr>
+              <p:cNvSpPr txBox="1">
+                <a:spLocks noRot="1" noChangeAspect="1" noMove="1" noResize="1" noEditPoints="1" noAdjustHandles="1" noChangeArrowheads="1" noChangeShapeType="1" noTextEdit="1"/>
+              </p:cNvSpPr>
+              <p:nvPr/>
+            </p:nvSpPr>
+            <p:spPr bwMode="auto">
+              <a:xfrm>
+                <a:off x="472440" y="621825"/>
+                <a:ext cx="10856976" cy="1077218"/>
+              </a:xfrm>
+              <a:prstGeom prst="rect">
+                <a:avLst/>
+              </a:prstGeom>
+              <a:blipFill>
+                <a:blip r:embed="rId2"/>
+                <a:stretch>
+                  <a:fillRect l="-1460" t="-7345" b="-17514"/>
+                </a:stretch>
+              </a:blipFill>
+              <a:ln>
+                <a:noFill/>
+              </a:ln>
+              <a:effectLst/>
+              <a:extLst>
+                <a:ext uri="{909E8E84-426E-40DD-AFC4-6F175D3DCCD1}">
+                  <a14:hiddenFill xmlns:a14="http://schemas.microsoft.com/office/drawing/2010/main">
+                    <a:solidFill>
+                      <a:schemeClr val="accent1"/>
+                    </a:solidFill>
+                  </a14:hiddenFill>
+                </a:ext>
+                <a:ext uri="{91240B29-F687-4F45-9708-019B960494DF}">
+                  <a14:hiddenLine xmlns:a14="http://schemas.microsoft.com/office/drawing/2010/main" w="9525">
+                    <a:solidFill>
+                      <a:schemeClr val="tx1"/>
+                    </a:solidFill>
+                    <a:miter lim="800000"/>
+                    <a:headEnd/>
+                    <a:tailEnd/>
+                  </a14:hiddenLine>
+                </a:ext>
+                <a:ext uri="{AF507438-7753-43E0-B8FC-AC1667EBCBE1}">
+                  <a14:hiddenEffects xmlns:a14="http://schemas.microsoft.com/office/drawing/2010/main">
+                    <a:effectLst>
+                      <a:outerShdw dist="35921" dir="2700000" algn="ctr" rotWithShape="0">
+                        <a:schemeClr val="bg2"/>
+                      </a:outerShdw>
+                    </a:effectLst>
+                  </a14:hiddenEffects>
+                </a:ext>
+              </a:extLst>
+            </p:spPr>
+            <p:txBody>
+              <a:bodyPr/>
+              <a:lstStyle/>
+              <a:p>
+                <a:r>
+                  <a:rPr lang="en-US">
+                    <a:noFill/>
+                  </a:rPr>
+                  <a:t> </a:t>
+                </a:r>
+              </a:p>
+            </p:txBody>
+          </p:sp>
+        </mc:Fallback>
+      </mc:AlternateContent>
+      <p:pic>
+        <p:nvPicPr>
+          <p:cNvPr id="4" name="Picture 3">
+            <a:extLst>
+              <a:ext uri="{FF2B5EF4-FFF2-40B4-BE49-F238E27FC236}">
+                <a16:creationId xmlns:a16="http://schemas.microsoft.com/office/drawing/2014/main" id="{13B8FB47-372D-1CFF-C81C-5D1DBEBDBD08}"/>
+              </a:ext>
+            </a:extLst>
+          </p:cNvPr>
+          <p:cNvPicPr>
+            <a:picLocks noChangeAspect="1"/>
+          </p:cNvPicPr>
+          <p:nvPr/>
+        </p:nvPicPr>
+        <p:blipFill>
+          <a:blip r:embed="rId3">
+            <a:extLst>
+              <a:ext uri="{28A0092B-C50C-407E-A947-70E740481C1C}">
+                <a14:useLocalDpi xmlns:a14="http://schemas.microsoft.com/office/drawing/2010/main" val="0"/>
+              </a:ext>
+            </a:extLst>
+          </a:blip>
+          <a:stretch>
+            <a:fillRect/>
+          </a:stretch>
+        </p:blipFill>
+        <p:spPr>
+          <a:xfrm>
+            <a:off x="472440" y="1793744"/>
+            <a:ext cx="6544069" cy="3599695"/>
+          </a:xfrm>
+          <a:prstGeom prst="rect">
+            <a:avLst/>
+          </a:prstGeom>
+          <a:ln>
+            <a:noFill/>
+          </a:ln>
+          <a:effectLst>
+            <a:softEdge rad="112500"/>
+          </a:effectLst>
+        </p:spPr>
+      </p:pic>
+      <p:pic>
+        <p:nvPicPr>
+          <p:cNvPr id="5" name="Picture 4">
+            <a:extLst>
+              <a:ext uri="{FF2B5EF4-FFF2-40B4-BE49-F238E27FC236}">
+                <a16:creationId xmlns:a16="http://schemas.microsoft.com/office/drawing/2014/main" id="{01D7A589-9EE5-FFB8-5DFB-8DB8422F13D1}"/>
+              </a:ext>
+            </a:extLst>
+          </p:cNvPr>
+          <p:cNvPicPr>
+            <a:picLocks noChangeAspect="1"/>
+          </p:cNvPicPr>
+          <p:nvPr/>
+        </p:nvPicPr>
+        <p:blipFill>
+          <a:blip r:embed="rId4"/>
+          <a:stretch>
+            <a:fillRect/>
+          </a:stretch>
+        </p:blipFill>
+        <p:spPr>
+          <a:xfrm>
+            <a:off x="7016509" y="1793744"/>
+            <a:ext cx="2262907" cy="724664"/>
+          </a:xfrm>
+          <a:prstGeom prst="rect">
+            <a:avLst/>
+          </a:prstGeom>
+          <a:ln>
+            <a:noFill/>
+          </a:ln>
+          <a:effectLst>
+            <a:softEdge rad="112500"/>
+          </a:effectLst>
+        </p:spPr>
+      </p:pic>
+      <p:pic>
+        <p:nvPicPr>
+          <p:cNvPr id="6" name="Picture 5">
+            <a:extLst>
+              <a:ext uri="{FF2B5EF4-FFF2-40B4-BE49-F238E27FC236}">
+                <a16:creationId xmlns:a16="http://schemas.microsoft.com/office/drawing/2014/main" id="{093F21DB-8C4D-0841-4080-BE0056A5B2AF}"/>
+              </a:ext>
+            </a:extLst>
+          </p:cNvPr>
+          <p:cNvPicPr>
+            <a:picLocks noChangeAspect="1"/>
+          </p:cNvPicPr>
+          <p:nvPr/>
+        </p:nvPicPr>
+        <p:blipFill>
+          <a:blip r:embed="rId5"/>
+          <a:stretch>
+            <a:fillRect/>
+          </a:stretch>
+        </p:blipFill>
+        <p:spPr>
+          <a:xfrm>
+            <a:off x="7016509" y="3076428"/>
+            <a:ext cx="5175491" cy="879495"/>
+          </a:xfrm>
+          <a:prstGeom prst="rect">
+            <a:avLst/>
+          </a:prstGeom>
+          <a:ln>
+            <a:noFill/>
+          </a:ln>
+          <a:effectLst>
+            <a:softEdge rad="112500"/>
+          </a:effectLst>
+        </p:spPr>
+      </p:pic>
+      <p:sp>
+        <p:nvSpPr>
+          <p:cNvPr id="7" name="Arrow: Down 6">
+            <a:extLst>
+              <a:ext uri="{FF2B5EF4-FFF2-40B4-BE49-F238E27FC236}">
+                <a16:creationId xmlns:a16="http://schemas.microsoft.com/office/drawing/2014/main" id="{6D4F512F-CAC6-E444-5F74-7BE3D29282DA}"/>
+              </a:ext>
+            </a:extLst>
+          </p:cNvPr>
+          <p:cNvSpPr/>
+          <p:nvPr/>
+        </p:nvSpPr>
+        <p:spPr>
+          <a:xfrm>
+            <a:off x="9279416" y="3982458"/>
+            <a:ext cx="438912" cy="512819"/>
+          </a:xfrm>
+          <a:prstGeom prst="downArrow">
+            <a:avLst/>
+          </a:prstGeom>
+        </p:spPr>
+        <p:style>
+          <a:lnRef idx="2">
+            <a:schemeClr val="accent1">
+              <a:shade val="15000"/>
+            </a:schemeClr>
+          </a:lnRef>
+          <a:fillRef idx="1">
+            <a:schemeClr val="accent1"/>
+          </a:fillRef>
+          <a:effectRef idx="0">
+            <a:schemeClr val="accent1"/>
+          </a:effectRef>
+          <a:fontRef idx="minor">
+            <a:schemeClr val="lt1"/>
+          </a:fontRef>
+        </p:style>
+        <p:txBody>
+          <a:bodyPr rtlCol="0" anchor="ctr"/>
+          <a:lstStyle/>
+          <a:p>
+            <a:pPr algn="ctr"/>
+            <a:endParaRPr lang="en-US"/>
+          </a:p>
+        </p:txBody>
+      </p:sp>
+      <p:pic>
+        <p:nvPicPr>
+          <p:cNvPr id="8" name="Picture 7">
+            <a:extLst>
+              <a:ext uri="{FF2B5EF4-FFF2-40B4-BE49-F238E27FC236}">
+                <a16:creationId xmlns:a16="http://schemas.microsoft.com/office/drawing/2014/main" id="{DA2E8497-12AC-ED2B-8783-CA3EE7672A78}"/>
+              </a:ext>
+            </a:extLst>
+          </p:cNvPr>
+          <p:cNvPicPr>
+            <a:picLocks noChangeAspect="1"/>
+          </p:cNvPicPr>
+          <p:nvPr/>
+        </p:nvPicPr>
+        <p:blipFill>
+          <a:blip r:embed="rId6"/>
+          <a:stretch>
+            <a:fillRect/>
+          </a:stretch>
+        </p:blipFill>
+        <p:spPr>
+          <a:xfrm>
+            <a:off x="7262986" y="4521812"/>
+            <a:ext cx="4471771" cy="928879"/>
+          </a:xfrm>
+          <a:prstGeom prst="rect">
+            <a:avLst/>
+          </a:prstGeom>
+          <a:ln>
+            <a:noFill/>
+          </a:ln>
+          <a:effectLst>
+            <a:softEdge rad="112500"/>
+          </a:effectLst>
+        </p:spPr>
+      </p:pic>
+      <p:pic>
+        <p:nvPicPr>
+          <p:cNvPr id="9" name="Picture 8">
+            <a:extLst>
+              <a:ext uri="{FF2B5EF4-FFF2-40B4-BE49-F238E27FC236}">
+                <a16:creationId xmlns:a16="http://schemas.microsoft.com/office/drawing/2014/main" id="{3D31E3A1-B112-B6EB-852B-1F081928D452}"/>
+              </a:ext>
+            </a:extLst>
+          </p:cNvPr>
+          <p:cNvPicPr>
+            <a:picLocks noChangeAspect="1"/>
+          </p:cNvPicPr>
+          <p:nvPr/>
+        </p:nvPicPr>
+        <p:blipFill>
+          <a:blip r:embed="rId7"/>
+          <a:stretch>
+            <a:fillRect/>
+          </a:stretch>
+        </p:blipFill>
+        <p:spPr>
+          <a:xfrm>
+            <a:off x="7829554" y="5707281"/>
+            <a:ext cx="3338633" cy="456565"/>
+          </a:xfrm>
+          <a:prstGeom prst="rect">
+            <a:avLst/>
+          </a:prstGeom>
+          <a:ln>
+            <a:noFill/>
+          </a:ln>
+          <a:effectLst>
+            <a:softEdge rad="112500"/>
+          </a:effectLst>
+        </p:spPr>
+      </p:pic>
+      <p:pic>
+        <p:nvPicPr>
+          <p:cNvPr id="10" name="Picture 9">
+            <a:extLst>
+              <a:ext uri="{FF2B5EF4-FFF2-40B4-BE49-F238E27FC236}">
+                <a16:creationId xmlns:a16="http://schemas.microsoft.com/office/drawing/2014/main" id="{56E59E56-85A4-356D-6BE9-6D1012B69C4A}"/>
+              </a:ext>
+            </a:extLst>
+          </p:cNvPr>
+          <p:cNvPicPr>
+            <a:picLocks noChangeAspect="1"/>
+          </p:cNvPicPr>
+          <p:nvPr/>
+        </p:nvPicPr>
+        <p:blipFill>
+          <a:blip r:embed="rId8"/>
+          <a:stretch>
+            <a:fillRect/>
+          </a:stretch>
+        </p:blipFill>
+        <p:spPr>
+          <a:xfrm>
+            <a:off x="7826506" y="5299160"/>
+            <a:ext cx="3323547" cy="523076"/>
+          </a:xfrm>
+          <a:prstGeom prst="rect">
+            <a:avLst/>
+          </a:prstGeom>
+          <a:ln>
+            <a:noFill/>
+          </a:ln>
+          <a:effectLst>
+            <a:softEdge rad="112500"/>
+          </a:effectLst>
+        </p:spPr>
+      </p:pic>
+      <p:sp>
+        <p:nvSpPr>
+          <p:cNvPr id="11" name="TextBox 10">
+            <a:extLst>
+              <a:ext uri="{FF2B5EF4-FFF2-40B4-BE49-F238E27FC236}">
+                <a16:creationId xmlns:a16="http://schemas.microsoft.com/office/drawing/2014/main" id="{177A5324-11BE-2F92-8D4A-A68B4E44ABFD}"/>
+              </a:ext>
+            </a:extLst>
+          </p:cNvPr>
+          <p:cNvSpPr txBox="1"/>
+          <p:nvPr/>
+        </p:nvSpPr>
+        <p:spPr>
+          <a:xfrm>
+            <a:off x="767878" y="5237532"/>
+            <a:ext cx="6213348" cy="646331"/>
+          </a:xfrm>
+          <a:prstGeom prst="rect">
+            <a:avLst/>
+          </a:prstGeom>
+          <a:noFill/>
+        </p:spPr>
+        <p:txBody>
+          <a:bodyPr wrap="square">
+            <a:spAutoFit/>
+          </a:bodyPr>
+          <a:lstStyle/>
+          <a:p>
+            <a:r>
+              <a:rPr lang="en-US" dirty="0" err="1">
+                <a:latin typeface="Times New Roman" panose="02020603050405020304" pitchFamily="18" charset="0"/>
+                <a:cs typeface="Times New Roman" panose="02020603050405020304" pitchFamily="18" charset="0"/>
+              </a:rPr>
+              <a:t>Obr</a:t>
+            </a:r>
+            <a:r>
+              <a:rPr lang="en-US" dirty="0">
+                <a:latin typeface="Times New Roman" panose="02020603050405020304" pitchFamily="18" charset="0"/>
+                <a:cs typeface="Times New Roman" panose="02020603050405020304" pitchFamily="18" charset="0"/>
+              </a:rPr>
+              <a:t>. 14: </a:t>
+            </a:r>
+            <a:r>
+              <a:rPr lang="en-US" dirty="0" err="1">
+                <a:latin typeface="Times New Roman" panose="02020603050405020304" pitchFamily="18" charset="0"/>
+                <a:cs typeface="Times New Roman" panose="02020603050405020304" pitchFamily="18" charset="0"/>
+              </a:rPr>
+              <a:t>Porovnanie</a:t>
+            </a:r>
+            <a:r>
+              <a:rPr lang="en-US" dirty="0">
+                <a:latin typeface="Times New Roman" panose="02020603050405020304" pitchFamily="18" charset="0"/>
+                <a:cs typeface="Times New Roman" panose="02020603050405020304" pitchFamily="18" charset="0"/>
+              </a:rPr>
+              <a:t> </a:t>
+            </a:r>
+            <a:r>
+              <a:rPr lang="en-US" dirty="0" err="1">
+                <a:latin typeface="Times New Roman" panose="02020603050405020304" pitchFamily="18" charset="0"/>
+                <a:cs typeface="Times New Roman" panose="02020603050405020304" pitchFamily="18" charset="0"/>
+              </a:rPr>
+              <a:t>skokovej</a:t>
+            </a:r>
+            <a:r>
+              <a:rPr lang="en-US" dirty="0">
+                <a:latin typeface="Times New Roman" panose="02020603050405020304" pitchFamily="18" charset="0"/>
+                <a:cs typeface="Times New Roman" panose="02020603050405020304" pitchFamily="18" charset="0"/>
+              </a:rPr>
+              <a:t> </a:t>
+            </a:r>
+            <a:r>
+              <a:rPr lang="en-US" dirty="0" err="1">
+                <a:latin typeface="Times New Roman" panose="02020603050405020304" pitchFamily="18" charset="0"/>
+                <a:cs typeface="Times New Roman" panose="02020603050405020304" pitchFamily="18" charset="0"/>
+              </a:rPr>
+              <a:t>odozvy</a:t>
+            </a:r>
+            <a:r>
+              <a:rPr lang="en-US" dirty="0">
+                <a:latin typeface="Times New Roman" panose="02020603050405020304" pitchFamily="18" charset="0"/>
+                <a:cs typeface="Times New Roman" panose="02020603050405020304" pitchFamily="18" charset="0"/>
+              </a:rPr>
+              <a:t> </a:t>
+            </a:r>
+            <a:r>
+              <a:rPr lang="en-US" dirty="0" err="1">
+                <a:latin typeface="Times New Roman" panose="02020603050405020304" pitchFamily="18" charset="0"/>
+                <a:cs typeface="Times New Roman" panose="02020603050405020304" pitchFamily="18" charset="0"/>
+              </a:rPr>
+              <a:t>reálneho</a:t>
+            </a:r>
+            <a:r>
+              <a:rPr lang="en-US" dirty="0">
+                <a:latin typeface="Times New Roman" panose="02020603050405020304" pitchFamily="18" charset="0"/>
+                <a:cs typeface="Times New Roman" panose="02020603050405020304" pitchFamily="18" charset="0"/>
+              </a:rPr>
+              <a:t> </a:t>
+            </a:r>
+            <a:r>
+              <a:rPr lang="en-US" dirty="0" err="1">
+                <a:latin typeface="Times New Roman" panose="02020603050405020304" pitchFamily="18" charset="0"/>
+                <a:cs typeface="Times New Roman" panose="02020603050405020304" pitchFamily="18" charset="0"/>
+              </a:rPr>
+              <a:t>systému</a:t>
+            </a:r>
+            <a:r>
+              <a:rPr lang="en-US" dirty="0">
+                <a:latin typeface="Times New Roman" panose="02020603050405020304" pitchFamily="18" charset="0"/>
+                <a:cs typeface="Times New Roman" panose="02020603050405020304" pitchFamily="18" charset="0"/>
+              </a:rPr>
+              <a:t> TS05 a </a:t>
+            </a:r>
+            <a:r>
+              <a:rPr lang="en-US" dirty="0" err="1">
+                <a:latin typeface="Times New Roman" panose="02020603050405020304" pitchFamily="18" charset="0"/>
+                <a:cs typeface="Times New Roman" panose="02020603050405020304" pitchFamily="18" charset="0"/>
+              </a:rPr>
+              <a:t>aproximovanýchmodelov</a:t>
+            </a:r>
+            <a:endParaRPr lang="en-US" dirty="0">
+              <a:latin typeface="Times New Roman" panose="02020603050405020304" pitchFamily="18" charset="0"/>
+              <a:cs typeface="Times New Roman" panose="02020603050405020304" pitchFamily="18" charset="0"/>
+            </a:endParaRPr>
+          </a:p>
+        </p:txBody>
+      </p:sp>
+    </p:spTree>
+    <p:extLst>
+      <p:ext uri="{BB962C8B-B14F-4D97-AF65-F5344CB8AC3E}">
+        <p14:creationId xmlns:p14="http://schemas.microsoft.com/office/powerpoint/2010/main" val="929568110"/>
+      </p:ext>
+    </p:extLst>
+  </p:cSld>
+  <p:clrMapOvr>
+    <a:masterClrMapping/>
+  </p:clrMapOvr>
+</p:sld>
+</file>
+
+<file path=ppt/slides/slide8.xml><?xml version="1.0" encoding="utf-8"?>
+<p:sld xmlns:a="http://schemas.openxmlformats.org/drawingml/2006/main" xmlns:r="http://schemas.openxmlformats.org/officeDocument/2006/relationships" xmlns:p="http://schemas.openxmlformats.org/presentationml/2006/main">
+  <p:cSld>
+    <p:spTree>
+      <p:nvGrpSpPr>
+        <p:cNvPr id="1" name=""/>
+        <p:cNvGrpSpPr/>
+        <p:nvPr/>
+      </p:nvGrpSpPr>
+      <p:grpSpPr>
+        <a:xfrm>
+          <a:off x="0" y="0"/>
+          <a:ext cx="0" cy="0"/>
+          <a:chOff x="0" y="0"/>
+          <a:chExt cx="0" cy="0"/>
+        </a:xfrm>
+      </p:grpSpPr>
+      <p:sp>
+        <p:nvSpPr>
+          <p:cNvPr id="2" name="Title 1">
+            <a:extLst>
+              <a:ext uri="{FF2B5EF4-FFF2-40B4-BE49-F238E27FC236}">
+                <a16:creationId xmlns:a16="http://schemas.microsoft.com/office/drawing/2014/main" id="{3D66BBDE-FC23-471C-965C-3949F221329F}"/>
+              </a:ext>
+            </a:extLst>
+          </p:cNvPr>
+          <p:cNvSpPr>
+            <a:spLocks noGrp="1"/>
+          </p:cNvSpPr>
+          <p:nvPr>
+            <p:ph type="ctrTitle"/>
+          </p:nvPr>
+        </p:nvSpPr>
+        <p:spPr/>
+        <p:txBody>
+          <a:bodyPr/>
+          <a:lstStyle/>
+          <a:p>
+            <a:r>
+              <a:rPr lang="en-US" dirty="0" err="1"/>
+              <a:t>Ďakujeme</a:t>
+            </a:r>
+            <a:r>
+              <a:rPr lang="en-US" dirty="0"/>
+              <a:t> za </a:t>
+            </a:r>
+            <a:r>
+              <a:rPr lang="en-US" dirty="0" err="1"/>
+              <a:t>pozornosť</a:t>
+            </a:r>
+            <a:endParaRPr lang="en-US" dirty="0"/>
+          </a:p>
+        </p:txBody>
+      </p:sp>
+      <p:sp>
+        <p:nvSpPr>
+          <p:cNvPr id="3" name="Subtitle 2">
+            <a:extLst>
+              <a:ext uri="{FF2B5EF4-FFF2-40B4-BE49-F238E27FC236}">
+                <a16:creationId xmlns:a16="http://schemas.microsoft.com/office/drawing/2014/main" id="{D7A1EBA0-A3B6-09FB-BAE8-3FF64FF566D0}"/>
+              </a:ext>
+            </a:extLst>
+          </p:cNvPr>
+          <p:cNvSpPr>
+            <a:spLocks noGrp="1"/>
+          </p:cNvSpPr>
+          <p:nvPr>
+            <p:ph type="subTitle" idx="1"/>
+          </p:nvPr>
+        </p:nvSpPr>
+        <p:spPr/>
+        <p:txBody>
+          <a:bodyPr/>
+          <a:lstStyle/>
+          <a:p>
+            <a:r>
+              <a:rPr lang="en-US" dirty="0" err="1"/>
+              <a:t>Máte</a:t>
+            </a:r>
+            <a:r>
+              <a:rPr lang="en-US" dirty="0"/>
+              <a:t> </a:t>
+            </a:r>
+            <a:r>
+              <a:rPr lang="en-US" dirty="0" err="1"/>
+              <a:t>nejaké</a:t>
+            </a:r>
+            <a:r>
+              <a:rPr lang="en-US" dirty="0"/>
+              <a:t> </a:t>
+            </a:r>
+            <a:r>
+              <a:rPr lang="en-US" dirty="0" err="1"/>
+              <a:t>otázky</a:t>
+            </a:r>
+            <a:r>
+              <a:rPr lang="en-US" dirty="0"/>
+              <a:t>?</a:t>
+            </a:r>
+          </a:p>
+        </p:txBody>
+      </p:sp>
+      <p:sp>
+        <p:nvSpPr>
+          <p:cNvPr id="4" name="Slide Number Placeholder 3">
+            <a:extLst>
+              <a:ext uri="{FF2B5EF4-FFF2-40B4-BE49-F238E27FC236}">
+                <a16:creationId xmlns:a16="http://schemas.microsoft.com/office/drawing/2014/main" id="{664C19B4-25E5-0439-C24E-0B6A42C0B242}"/>
+              </a:ext>
+            </a:extLst>
+          </p:cNvPr>
+          <p:cNvSpPr>
+            <a:spLocks noGrp="1"/>
+          </p:cNvSpPr>
+          <p:nvPr>
+            <p:ph type="sldNum" sz="quarter" idx="12"/>
+          </p:nvPr>
+        </p:nvSpPr>
+        <p:spPr/>
+        <p:txBody>
+          <a:bodyPr/>
+          <a:lstStyle/>
+          <a:p>
+            <a:fld id="{6CAE0FC8-C62F-4561-A15C-F1B236593633}" type="slidenum">
+              <a:rPr lang="en-US" smtClean="0"/>
+              <a:t>8</a:t>
             </a:fld>
             <a:endParaRPr lang="en-US" dirty="0"/>
           </a:p>
